--- a/Reporting/Claude Presents/Deck2_Signals/Signals_and_Signal_Boxes_Explained.pptx
+++ b/Reporting/Claude Presents/Deck2_Signals/Signals_and_Signal_Boxes_Explained.pptx
@@ -973,6 +973,174 @@
   <p:clrMapOvr>
     <a:masterClrMapping/>
   </p:clrMapOvr>
+  <mc:AlternateContent xmlns:mc="http://schemas.openxmlformats.org/markup-compatibility/2006">
+    <mc:Choice xmlns:p14="http://schemas.microsoft.com/office/powerpoint/2010/main" Requires="p14">
+      <p:transition spd="med" p14:dur="700">
+        <p:fade/>
+      </p:transition>
+    </mc:Choice>
+    <mc:Fallback>
+      <p:transition spd="med">
+        <p:fade/>
+      </p:transition>
+    </mc:Fallback>
+  </mc:AlternateContent>
+  <p:timing>
+    <p:tnLst>
+      <p:par>
+        <p:cTn id="1" dur="indefinite" restart="never" nodeType="tmRoot">
+          <p:childTnLst>
+            <p:seq concurrent="1" nextAc="seek">
+              <p:cTn id="2" dur="indefinite" nodeType="mainSeq">
+                <p:childTnLst>
+                  <p:par>
+                    <p:cTn id="3" fill="hold">
+                      <p:stCondLst>
+                        <p:cond delay="indefinite"/>
+                        <p:cond evt="onBegin" delay="0">
+                          <p:tn val="2"/>
+                        </p:cond>
+                      </p:stCondLst>
+                      <p:childTnLst>
+                        <p:par>
+                          <p:cTn id="4" fill="hold">
+                            <p:stCondLst>
+                              <p:cond delay="0"/>
+                            </p:stCondLst>
+                            <p:childTnLst>
+                              <p:par>
+                                <p:cTn id="5" presetID="10" presetClass="entr" presetSubtype="0" fill="hold" nodeType="afterEffect">
+                                  <p:stCondLst>
+                                    <p:cond delay="0"/>
+                                  </p:stCondLst>
+                                  <p:childTnLst>
+                                    <p:set>
+                                      <p:cBhvr>
+                                        <p:cTn id="6" dur="1" fill="hold">
+                                          <p:stCondLst>
+                                            <p:cond delay="0"/>
+                                          </p:stCondLst>
+                                        </p:cTn>
+                                        <p:tgtEl>
+                                          <p:spTgt spid="4"/>
+                                        </p:tgtEl>
+                                        <p:attrNameLst>
+                                          <p:attrName>style.visibility</p:attrName>
+                                        </p:attrNameLst>
+                                      </p:cBhvr>
+                                      <p:to>
+                                        <p:strVal val="visible"/>
+                                      </p:to>
+                                    </p:set>
+                                    <p:animEffect transition="in" filter="fade">
+                                      <p:cBhvr>
+                                        <p:cTn id="7" dur="500"/>
+                                        <p:tgtEl>
+                                          <p:spTgt spid="4"/>
+                                        </p:tgtEl>
+                                      </p:cBhvr>
+                                    </p:animEffect>
+                                  </p:childTnLst>
+                                </p:cTn>
+                              </p:par>
+                              <p:par>
+                                <p:cTn id="8" presetID="10" presetClass="entr" presetSubtype="0" fill="hold" nodeType="withEffect">
+                                  <p:stCondLst>
+                                    <p:cond delay="300"/>
+                                  </p:stCondLst>
+                                  <p:childTnLst>
+                                    <p:set>
+                                      <p:cBhvr>
+                                        <p:cTn id="9" dur="1" fill="hold">
+                                          <p:stCondLst>
+                                            <p:cond delay="0"/>
+                                          </p:stCondLst>
+                                        </p:cTn>
+                                        <p:tgtEl>
+                                          <p:spTgt spid="5"/>
+                                        </p:tgtEl>
+                                        <p:attrNameLst>
+                                          <p:attrName>style.visibility</p:attrName>
+                                        </p:attrNameLst>
+                                      </p:cBhvr>
+                                      <p:to>
+                                        <p:strVal val="visible"/>
+                                      </p:to>
+                                    </p:set>
+                                    <p:animEffect transition="in" filter="fade">
+                                      <p:cBhvr>
+                                        <p:cTn id="10" dur="500"/>
+                                        <p:tgtEl>
+                                          <p:spTgt spid="5"/>
+                                        </p:tgtEl>
+                                      </p:cBhvr>
+                                    </p:animEffect>
+                                  </p:childTnLst>
+                                </p:cTn>
+                              </p:par>
+                              <p:par>
+                                <p:cTn id="11" presetID="10" presetClass="entr" presetSubtype="0" fill="hold" nodeType="withEffect">
+                                  <p:stCondLst>
+                                    <p:cond delay="600"/>
+                                  </p:stCondLst>
+                                  <p:childTnLst>
+                                    <p:set>
+                                      <p:cBhvr>
+                                        <p:cTn id="12" dur="1" fill="hold">
+                                          <p:stCondLst>
+                                            <p:cond delay="0"/>
+                                          </p:stCondLst>
+                                        </p:cTn>
+                                        <p:tgtEl>
+                                          <p:spTgt spid="6"/>
+                                        </p:tgtEl>
+                                        <p:attrNameLst>
+                                          <p:attrName>style.visibility</p:attrName>
+                                        </p:attrNameLst>
+                                      </p:cBhvr>
+                                      <p:to>
+                                        <p:strVal val="visible"/>
+                                      </p:to>
+                                    </p:set>
+                                    <p:animEffect transition="in" filter="fade">
+                                      <p:cBhvr>
+                                        <p:cTn id="13" dur="500"/>
+                                        <p:tgtEl>
+                                          <p:spTgt spid="6"/>
+                                        </p:tgtEl>
+                                      </p:cBhvr>
+                                    </p:animEffect>
+                                  </p:childTnLst>
+                                </p:cTn>
+                              </p:par>
+                            </p:childTnLst>
+                          </p:cTn>
+                        </p:par>
+                      </p:childTnLst>
+                    </p:cTn>
+                  </p:par>
+                </p:childTnLst>
+              </p:cTn>
+              <p:prevCondLst>
+                <p:cond evt="onPrev" delay="0">
+                  <p:tgtEl>
+                    <p:sldTgt/>
+                  </p:tgtEl>
+                </p:cond>
+              </p:prevCondLst>
+              <p:nextCondLst>
+                <p:cond evt="onNext" delay="0">
+                  <p:tgtEl>
+                    <p:sldTgt/>
+                  </p:tgtEl>
+                </p:cond>
+              </p:nextCondLst>
+            </p:seq>
+          </p:childTnLst>
+        </p:cTn>
+      </p:par>
+    </p:tnLst>
+  </p:timing>
 </p:sld>
 </file>
 
@@ -2883,6 +3051,209 @@
   <p:clrMapOvr>
     <a:masterClrMapping/>
   </p:clrMapOvr>
+  <mc:AlternateContent xmlns:mc="http://schemas.openxmlformats.org/markup-compatibility/2006">
+    <mc:Choice xmlns:p14="http://schemas.microsoft.com/office/powerpoint/2010/main" Requires="p14">
+      <p:transition spd="med" p14:dur="700">
+        <p:fade/>
+      </p:transition>
+    </mc:Choice>
+    <mc:Fallback>
+      <p:transition spd="med">
+        <p:fade/>
+      </p:transition>
+    </mc:Fallback>
+  </mc:AlternateContent>
+  <p:timing>
+    <p:tnLst>
+      <p:par>
+        <p:cTn id="1" dur="indefinite" restart="never" nodeType="tmRoot">
+          <p:childTnLst>
+            <p:seq concurrent="1" nextAc="seek">
+              <p:cTn id="2" dur="indefinite" nodeType="mainSeq">
+                <p:childTnLst>
+                  <p:par>
+                    <p:cTn id="3" fill="hold">
+                      <p:stCondLst>
+                        <p:cond delay="indefinite"/>
+                        <p:cond evt="onBegin" delay="0">
+                          <p:tn val="2"/>
+                        </p:cond>
+                      </p:stCondLst>
+                      <p:childTnLst>
+                        <p:par>
+                          <p:cTn id="4" fill="hold">
+                            <p:stCondLst>
+                              <p:cond delay="0"/>
+                            </p:stCondLst>
+                            <p:childTnLst>
+                              <p:par>
+                                <p:cTn id="5" presetID="10" presetClass="entr" presetSubtype="0" fill="hold" nodeType="afterEffect">
+                                  <p:stCondLst>
+                                    <p:cond delay="0"/>
+                                  </p:stCondLst>
+                                  <p:childTnLst>
+                                    <p:set>
+                                      <p:cBhvr>
+                                        <p:cTn id="6" dur="1" fill="hold">
+                                          <p:stCondLst>
+                                            <p:cond delay="0"/>
+                                          </p:stCondLst>
+                                        </p:cTn>
+                                        <p:tgtEl>
+                                          <p:spTgt spid="4"/>
+                                        </p:tgtEl>
+                                        <p:attrNameLst>
+                                          <p:attrName>style.visibility</p:attrName>
+                                        </p:attrNameLst>
+                                      </p:cBhvr>
+                                      <p:to>
+                                        <p:strVal val="visible"/>
+                                      </p:to>
+                                    </p:set>
+                                    <p:animEffect transition="in" filter="fade">
+                                      <p:cBhvr>
+                                        <p:cTn id="7" dur="500"/>
+                                        <p:tgtEl>
+                                          <p:spTgt spid="4"/>
+                                        </p:tgtEl>
+                                      </p:cBhvr>
+                                    </p:animEffect>
+                                  </p:childTnLst>
+                                </p:cTn>
+                              </p:par>
+                              <p:par>
+                                <p:cTn id="8" presetID="10" presetClass="entr" presetSubtype="0" fill="hold" nodeType="withEffect">
+                                  <p:stCondLst>
+                                    <p:cond delay="300"/>
+                                  </p:stCondLst>
+                                  <p:childTnLst>
+                                    <p:set>
+                                      <p:cBhvr>
+                                        <p:cTn id="9" dur="1" fill="hold">
+                                          <p:stCondLst>
+                                            <p:cond delay="0"/>
+                                          </p:stCondLst>
+                                        </p:cTn>
+                                        <p:tgtEl>
+                                          <p:spTgt spid="53"/>
+                                        </p:tgtEl>
+                                        <p:attrNameLst>
+                                          <p:attrName>style.visibility</p:attrName>
+                                        </p:attrNameLst>
+                                      </p:cBhvr>
+                                      <p:to>
+                                        <p:strVal val="visible"/>
+                                      </p:to>
+                                    </p:set>
+                                    <p:animEffect transition="in" filter="fade">
+                                      <p:cBhvr>
+                                        <p:cTn id="10" dur="500"/>
+                                        <p:tgtEl>
+                                          <p:spTgt spid="53"/>
+                                        </p:tgtEl>
+                                      </p:cBhvr>
+                                    </p:animEffect>
+                                  </p:childTnLst>
+                                </p:cTn>
+                              </p:par>
+                              <p:par>
+                                <p:cTn id="11" presetID="10" presetClass="entr" presetSubtype="0" fill="hold" nodeType="withEffect">
+                                  <p:stCondLst>
+                                    <p:cond delay="600"/>
+                                  </p:stCondLst>
+                                  <p:childTnLst>
+                                    <p:set>
+                                      <p:cBhvr>
+                                        <p:cTn id="12" dur="1" fill="hold">
+                                          <p:stCondLst>
+                                            <p:cond delay="0"/>
+                                          </p:stCondLst>
+                                        </p:cTn>
+                                        <p:tgtEl>
+                                          <p:spTgt spid="55"/>
+                                        </p:tgtEl>
+                                        <p:attrNameLst>
+                                          <p:attrName>style.visibility</p:attrName>
+                                        </p:attrNameLst>
+                                      </p:cBhvr>
+                                      <p:to>
+                                        <p:strVal val="visible"/>
+                                      </p:to>
+                                    </p:set>
+                                    <p:animEffect transition="in" filter="fade">
+                                      <p:cBhvr>
+                                        <p:cTn id="13" dur="500"/>
+                                        <p:tgtEl>
+                                          <p:spTgt spid="55"/>
+                                        </p:tgtEl>
+                                      </p:cBhvr>
+                                    </p:animEffect>
+                                  </p:childTnLst>
+                                </p:cTn>
+                              </p:par>
+                              <p:par>
+                                <p:cTn id="14" presetID="10" presetClass="entr" presetSubtype="0" fill="hold" nodeType="withEffect">
+                                  <p:stCondLst>
+                                    <p:cond delay="900"/>
+                                  </p:stCondLst>
+                                  <p:childTnLst>
+                                    <p:set>
+                                      <p:cBhvr>
+                                        <p:cTn id="15" dur="1" fill="hold">
+                                          <p:stCondLst>
+                                            <p:cond delay="0"/>
+                                          </p:stCondLst>
+                                        </p:cTn>
+                                        <p:tgtEl>
+                                          <p:spTgt spid="56"/>
+                                        </p:tgtEl>
+                                        <p:attrNameLst>
+                                          <p:attrName>style.visibility</p:attrName>
+                                        </p:attrNameLst>
+                                      </p:cBhvr>
+                                      <p:to>
+                                        <p:strVal val="visible"/>
+                                      </p:to>
+                                    </p:set>
+                                    <p:animEffect transition="in" filter="fade">
+                                      <p:cBhvr>
+                                        <p:cTn id="16" dur="500"/>
+                                        <p:tgtEl>
+                                          <p:spTgt spid="56"/>
+                                        </p:tgtEl>
+                                      </p:cBhvr>
+                                    </p:animEffect>
+                                  </p:childTnLst>
+                                </p:cTn>
+                              </p:par>
+                            </p:childTnLst>
+                          </p:cTn>
+                        </p:par>
+                      </p:childTnLst>
+                    </p:cTn>
+                  </p:par>
+                </p:childTnLst>
+              </p:cTn>
+              <p:prevCondLst>
+                <p:cond evt="onPrev" delay="0">
+                  <p:tgtEl>
+                    <p:sldTgt/>
+                  </p:tgtEl>
+                </p:cond>
+              </p:prevCondLst>
+              <p:nextCondLst>
+                <p:cond evt="onNext" delay="0">
+                  <p:tgtEl>
+                    <p:sldTgt/>
+                  </p:tgtEl>
+                </p:cond>
+              </p:nextCondLst>
+            </p:seq>
+          </p:childTnLst>
+        </p:cTn>
+      </p:par>
+    </p:tnLst>
+  </p:timing>
 </p:sld>
 </file>
 
@@ -3541,6 +3912,209 @@
   <p:clrMapOvr>
     <a:masterClrMapping/>
   </p:clrMapOvr>
+  <mc:AlternateContent xmlns:mc="http://schemas.openxmlformats.org/markup-compatibility/2006">
+    <mc:Choice xmlns:p14="http://schemas.microsoft.com/office/powerpoint/2010/main" Requires="p14">
+      <p:transition spd="med" p14:dur="700">
+        <p:fade/>
+      </p:transition>
+    </mc:Choice>
+    <mc:Fallback>
+      <p:transition spd="med">
+        <p:fade/>
+      </p:transition>
+    </mc:Fallback>
+  </mc:AlternateContent>
+  <p:timing>
+    <p:tnLst>
+      <p:par>
+        <p:cTn id="1" dur="indefinite" restart="never" nodeType="tmRoot">
+          <p:childTnLst>
+            <p:seq concurrent="1" nextAc="seek">
+              <p:cTn id="2" dur="indefinite" nodeType="mainSeq">
+                <p:childTnLst>
+                  <p:par>
+                    <p:cTn id="3" fill="hold">
+                      <p:stCondLst>
+                        <p:cond delay="indefinite"/>
+                        <p:cond evt="onBegin" delay="0">
+                          <p:tn val="2"/>
+                        </p:cond>
+                      </p:stCondLst>
+                      <p:childTnLst>
+                        <p:par>
+                          <p:cTn id="4" fill="hold">
+                            <p:stCondLst>
+                              <p:cond delay="0"/>
+                            </p:stCondLst>
+                            <p:childTnLst>
+                              <p:par>
+                                <p:cTn id="5" presetID="10" presetClass="entr" presetSubtype="0" fill="hold" nodeType="afterEffect">
+                                  <p:stCondLst>
+                                    <p:cond delay="0"/>
+                                  </p:stCondLst>
+                                  <p:childTnLst>
+                                    <p:set>
+                                      <p:cBhvr>
+                                        <p:cTn id="6" dur="1" fill="hold">
+                                          <p:stCondLst>
+                                            <p:cond delay="0"/>
+                                          </p:stCondLst>
+                                        </p:cTn>
+                                        <p:tgtEl>
+                                          <p:spTgt spid="4"/>
+                                        </p:tgtEl>
+                                        <p:attrNameLst>
+                                          <p:attrName>style.visibility</p:attrName>
+                                        </p:attrNameLst>
+                                      </p:cBhvr>
+                                      <p:to>
+                                        <p:strVal val="visible"/>
+                                      </p:to>
+                                    </p:set>
+                                    <p:animEffect transition="in" filter="fade">
+                                      <p:cBhvr>
+                                        <p:cTn id="7" dur="500"/>
+                                        <p:tgtEl>
+                                          <p:spTgt spid="4"/>
+                                        </p:tgtEl>
+                                      </p:cBhvr>
+                                    </p:animEffect>
+                                  </p:childTnLst>
+                                </p:cTn>
+                              </p:par>
+                              <p:par>
+                                <p:cTn id="8" presetID="10" presetClass="entr" presetSubtype="0" fill="hold" nodeType="withEffect">
+                                  <p:stCondLst>
+                                    <p:cond delay="300"/>
+                                  </p:stCondLst>
+                                  <p:childTnLst>
+                                    <p:set>
+                                      <p:cBhvr>
+                                        <p:cTn id="9" dur="1" fill="hold">
+                                          <p:stCondLst>
+                                            <p:cond delay="0"/>
+                                          </p:stCondLst>
+                                        </p:cTn>
+                                        <p:tgtEl>
+                                          <p:spTgt spid="6"/>
+                                        </p:tgtEl>
+                                        <p:attrNameLst>
+                                          <p:attrName>style.visibility</p:attrName>
+                                        </p:attrNameLst>
+                                      </p:cBhvr>
+                                      <p:to>
+                                        <p:strVal val="visible"/>
+                                      </p:to>
+                                    </p:set>
+                                    <p:animEffect transition="in" filter="fade">
+                                      <p:cBhvr>
+                                        <p:cTn id="10" dur="500"/>
+                                        <p:tgtEl>
+                                          <p:spTgt spid="6"/>
+                                        </p:tgtEl>
+                                      </p:cBhvr>
+                                    </p:animEffect>
+                                  </p:childTnLst>
+                                </p:cTn>
+                              </p:par>
+                              <p:par>
+                                <p:cTn id="11" presetID="10" presetClass="entr" presetSubtype="0" fill="hold" nodeType="withEffect">
+                                  <p:stCondLst>
+                                    <p:cond delay="600"/>
+                                  </p:stCondLst>
+                                  <p:childTnLst>
+                                    <p:set>
+                                      <p:cBhvr>
+                                        <p:cTn id="12" dur="1" fill="hold">
+                                          <p:stCondLst>
+                                            <p:cond delay="0"/>
+                                          </p:stCondLst>
+                                        </p:cTn>
+                                        <p:tgtEl>
+                                          <p:spTgt spid="18"/>
+                                        </p:tgtEl>
+                                        <p:attrNameLst>
+                                          <p:attrName>style.visibility</p:attrName>
+                                        </p:attrNameLst>
+                                      </p:cBhvr>
+                                      <p:to>
+                                        <p:strVal val="visible"/>
+                                      </p:to>
+                                    </p:set>
+                                    <p:animEffect transition="in" filter="fade">
+                                      <p:cBhvr>
+                                        <p:cTn id="13" dur="500"/>
+                                        <p:tgtEl>
+                                          <p:spTgt spid="18"/>
+                                        </p:tgtEl>
+                                      </p:cBhvr>
+                                    </p:animEffect>
+                                  </p:childTnLst>
+                                </p:cTn>
+                              </p:par>
+                              <p:par>
+                                <p:cTn id="14" presetID="10" presetClass="entr" presetSubtype="0" fill="hold" nodeType="withEffect">
+                                  <p:stCondLst>
+                                    <p:cond delay="900"/>
+                                  </p:stCondLst>
+                                  <p:childTnLst>
+                                    <p:set>
+                                      <p:cBhvr>
+                                        <p:cTn id="15" dur="1" fill="hold">
+                                          <p:stCondLst>
+                                            <p:cond delay="0"/>
+                                          </p:stCondLst>
+                                        </p:cTn>
+                                        <p:tgtEl>
+                                          <p:spTgt spid="19"/>
+                                        </p:tgtEl>
+                                        <p:attrNameLst>
+                                          <p:attrName>style.visibility</p:attrName>
+                                        </p:attrNameLst>
+                                      </p:cBhvr>
+                                      <p:to>
+                                        <p:strVal val="visible"/>
+                                      </p:to>
+                                    </p:set>
+                                    <p:animEffect transition="in" filter="fade">
+                                      <p:cBhvr>
+                                        <p:cTn id="16" dur="500"/>
+                                        <p:tgtEl>
+                                          <p:spTgt spid="19"/>
+                                        </p:tgtEl>
+                                      </p:cBhvr>
+                                    </p:animEffect>
+                                  </p:childTnLst>
+                                </p:cTn>
+                              </p:par>
+                            </p:childTnLst>
+                          </p:cTn>
+                        </p:par>
+                      </p:childTnLst>
+                    </p:cTn>
+                  </p:par>
+                </p:childTnLst>
+              </p:cTn>
+              <p:prevCondLst>
+                <p:cond evt="onPrev" delay="0">
+                  <p:tgtEl>
+                    <p:sldTgt/>
+                  </p:tgtEl>
+                </p:cond>
+              </p:prevCondLst>
+              <p:nextCondLst>
+                <p:cond evt="onNext" delay="0">
+                  <p:tgtEl>
+                    <p:sldTgt/>
+                  </p:tgtEl>
+                </p:cond>
+              </p:nextCondLst>
+            </p:seq>
+          </p:childTnLst>
+        </p:cTn>
+      </p:par>
+    </p:tnLst>
+  </p:timing>
 </p:sld>
 </file>
 
@@ -5500,6 +6074,174 @@
   <p:clrMapOvr>
     <a:masterClrMapping/>
   </p:clrMapOvr>
+  <mc:AlternateContent xmlns:mc="http://schemas.openxmlformats.org/markup-compatibility/2006">
+    <mc:Choice xmlns:p14="http://schemas.microsoft.com/office/powerpoint/2010/main" Requires="p14">
+      <p:transition spd="med" p14:dur="700">
+        <p:fade/>
+      </p:transition>
+    </mc:Choice>
+    <mc:Fallback>
+      <p:transition spd="med">
+        <p:fade/>
+      </p:transition>
+    </mc:Fallback>
+  </mc:AlternateContent>
+  <p:timing>
+    <p:tnLst>
+      <p:par>
+        <p:cTn id="1" dur="indefinite" restart="never" nodeType="tmRoot">
+          <p:childTnLst>
+            <p:seq concurrent="1" nextAc="seek">
+              <p:cTn id="2" dur="indefinite" nodeType="mainSeq">
+                <p:childTnLst>
+                  <p:par>
+                    <p:cTn id="3" fill="hold">
+                      <p:stCondLst>
+                        <p:cond delay="indefinite"/>
+                        <p:cond evt="onBegin" delay="0">
+                          <p:tn val="2"/>
+                        </p:cond>
+                      </p:stCondLst>
+                      <p:childTnLst>
+                        <p:par>
+                          <p:cTn id="4" fill="hold">
+                            <p:stCondLst>
+                              <p:cond delay="0"/>
+                            </p:stCondLst>
+                            <p:childTnLst>
+                              <p:par>
+                                <p:cTn id="5" presetID="10" presetClass="entr" presetSubtype="0" fill="hold" nodeType="afterEffect">
+                                  <p:stCondLst>
+                                    <p:cond delay="0"/>
+                                  </p:stCondLst>
+                                  <p:childTnLst>
+                                    <p:set>
+                                      <p:cBhvr>
+                                        <p:cTn id="6" dur="1" fill="hold">
+                                          <p:stCondLst>
+                                            <p:cond delay="0"/>
+                                          </p:stCondLst>
+                                        </p:cTn>
+                                        <p:tgtEl>
+                                          <p:spTgt spid="4"/>
+                                        </p:tgtEl>
+                                        <p:attrNameLst>
+                                          <p:attrName>style.visibility</p:attrName>
+                                        </p:attrNameLst>
+                                      </p:cBhvr>
+                                      <p:to>
+                                        <p:strVal val="visible"/>
+                                      </p:to>
+                                    </p:set>
+                                    <p:animEffect transition="in" filter="fade">
+                                      <p:cBhvr>
+                                        <p:cTn id="7" dur="500"/>
+                                        <p:tgtEl>
+                                          <p:spTgt spid="4"/>
+                                        </p:tgtEl>
+                                      </p:cBhvr>
+                                    </p:animEffect>
+                                  </p:childTnLst>
+                                </p:cTn>
+                              </p:par>
+                              <p:par>
+                                <p:cTn id="8" presetID="10" presetClass="entr" presetSubtype="0" fill="hold" nodeType="withEffect">
+                                  <p:stCondLst>
+                                    <p:cond delay="300"/>
+                                  </p:stCondLst>
+                                  <p:childTnLst>
+                                    <p:set>
+                                      <p:cBhvr>
+                                        <p:cTn id="9" dur="1" fill="hold">
+                                          <p:stCondLst>
+                                            <p:cond delay="0"/>
+                                          </p:stCondLst>
+                                        </p:cTn>
+                                        <p:tgtEl>
+                                          <p:spTgt spid="72"/>
+                                        </p:tgtEl>
+                                        <p:attrNameLst>
+                                          <p:attrName>style.visibility</p:attrName>
+                                        </p:attrNameLst>
+                                      </p:cBhvr>
+                                      <p:to>
+                                        <p:strVal val="visible"/>
+                                      </p:to>
+                                    </p:set>
+                                    <p:animEffect transition="in" filter="fade">
+                                      <p:cBhvr>
+                                        <p:cTn id="10" dur="500"/>
+                                        <p:tgtEl>
+                                          <p:spTgt spid="72"/>
+                                        </p:tgtEl>
+                                      </p:cBhvr>
+                                    </p:animEffect>
+                                  </p:childTnLst>
+                                </p:cTn>
+                              </p:par>
+                              <p:par>
+                                <p:cTn id="11" presetID="10" presetClass="entr" presetSubtype="0" fill="hold" nodeType="withEffect">
+                                  <p:stCondLst>
+                                    <p:cond delay="600"/>
+                                  </p:stCondLst>
+                                  <p:childTnLst>
+                                    <p:set>
+                                      <p:cBhvr>
+                                        <p:cTn id="12" dur="1" fill="hold">
+                                          <p:stCondLst>
+                                            <p:cond delay="0"/>
+                                          </p:stCondLst>
+                                        </p:cTn>
+                                        <p:tgtEl>
+                                          <p:spTgt spid="73"/>
+                                        </p:tgtEl>
+                                        <p:attrNameLst>
+                                          <p:attrName>style.visibility</p:attrName>
+                                        </p:attrNameLst>
+                                      </p:cBhvr>
+                                      <p:to>
+                                        <p:strVal val="visible"/>
+                                      </p:to>
+                                    </p:set>
+                                    <p:animEffect transition="in" filter="fade">
+                                      <p:cBhvr>
+                                        <p:cTn id="13" dur="500"/>
+                                        <p:tgtEl>
+                                          <p:spTgt spid="73"/>
+                                        </p:tgtEl>
+                                      </p:cBhvr>
+                                    </p:animEffect>
+                                  </p:childTnLst>
+                                </p:cTn>
+                              </p:par>
+                            </p:childTnLst>
+                          </p:cTn>
+                        </p:par>
+                      </p:childTnLst>
+                    </p:cTn>
+                  </p:par>
+                </p:childTnLst>
+              </p:cTn>
+              <p:prevCondLst>
+                <p:cond evt="onPrev" delay="0">
+                  <p:tgtEl>
+                    <p:sldTgt/>
+                  </p:tgtEl>
+                </p:cond>
+              </p:prevCondLst>
+              <p:nextCondLst>
+                <p:cond evt="onNext" delay="0">
+                  <p:tgtEl>
+                    <p:sldTgt/>
+                  </p:tgtEl>
+                </p:cond>
+              </p:nextCondLst>
+            </p:seq>
+          </p:childTnLst>
+        </p:cTn>
+      </p:par>
+    </p:tnLst>
+  </p:timing>
 </p:sld>
 </file>
 
@@ -6472,6 +7214,174 @@
   <p:clrMapOvr>
     <a:masterClrMapping/>
   </p:clrMapOvr>
+  <mc:AlternateContent xmlns:mc="http://schemas.openxmlformats.org/markup-compatibility/2006">
+    <mc:Choice xmlns:p14="http://schemas.microsoft.com/office/powerpoint/2010/main" Requires="p14">
+      <p:transition spd="med" p14:dur="700">
+        <p:fade/>
+      </p:transition>
+    </mc:Choice>
+    <mc:Fallback>
+      <p:transition spd="med">
+        <p:fade/>
+      </p:transition>
+    </mc:Fallback>
+  </mc:AlternateContent>
+  <p:timing>
+    <p:tnLst>
+      <p:par>
+        <p:cTn id="1" dur="indefinite" restart="never" nodeType="tmRoot">
+          <p:childTnLst>
+            <p:seq concurrent="1" nextAc="seek">
+              <p:cTn id="2" dur="indefinite" nodeType="mainSeq">
+                <p:childTnLst>
+                  <p:par>
+                    <p:cTn id="3" fill="hold">
+                      <p:stCondLst>
+                        <p:cond delay="indefinite"/>
+                        <p:cond evt="onBegin" delay="0">
+                          <p:tn val="2"/>
+                        </p:cond>
+                      </p:stCondLst>
+                      <p:childTnLst>
+                        <p:par>
+                          <p:cTn id="4" fill="hold">
+                            <p:stCondLst>
+                              <p:cond delay="0"/>
+                            </p:stCondLst>
+                            <p:childTnLst>
+                              <p:par>
+                                <p:cTn id="5" presetID="10" presetClass="entr" presetSubtype="0" fill="hold" nodeType="afterEffect">
+                                  <p:stCondLst>
+                                    <p:cond delay="0"/>
+                                  </p:stCondLst>
+                                  <p:childTnLst>
+                                    <p:set>
+                                      <p:cBhvr>
+                                        <p:cTn id="6" dur="1" fill="hold">
+                                          <p:stCondLst>
+                                            <p:cond delay="0"/>
+                                          </p:stCondLst>
+                                        </p:cTn>
+                                        <p:tgtEl>
+                                          <p:spTgt spid="4"/>
+                                        </p:tgtEl>
+                                        <p:attrNameLst>
+                                          <p:attrName>style.visibility</p:attrName>
+                                        </p:attrNameLst>
+                                      </p:cBhvr>
+                                      <p:to>
+                                        <p:strVal val="visible"/>
+                                      </p:to>
+                                    </p:set>
+                                    <p:animEffect transition="in" filter="fade">
+                                      <p:cBhvr>
+                                        <p:cTn id="7" dur="500"/>
+                                        <p:tgtEl>
+                                          <p:spTgt spid="4"/>
+                                        </p:tgtEl>
+                                      </p:cBhvr>
+                                    </p:animEffect>
+                                  </p:childTnLst>
+                                </p:cTn>
+                              </p:par>
+                              <p:par>
+                                <p:cTn id="8" presetID="10" presetClass="entr" presetSubtype="0" fill="hold" nodeType="withEffect">
+                                  <p:stCondLst>
+                                    <p:cond delay="300"/>
+                                  </p:stCondLst>
+                                  <p:childTnLst>
+                                    <p:set>
+                                      <p:cBhvr>
+                                        <p:cTn id="9" dur="1" fill="hold">
+                                          <p:stCondLst>
+                                            <p:cond delay="0"/>
+                                          </p:stCondLst>
+                                        </p:cTn>
+                                        <p:tgtEl>
+                                          <p:spTgt spid="29"/>
+                                        </p:tgtEl>
+                                        <p:attrNameLst>
+                                          <p:attrName>style.visibility</p:attrName>
+                                        </p:attrNameLst>
+                                      </p:cBhvr>
+                                      <p:to>
+                                        <p:strVal val="visible"/>
+                                      </p:to>
+                                    </p:set>
+                                    <p:animEffect transition="in" filter="fade">
+                                      <p:cBhvr>
+                                        <p:cTn id="10" dur="500"/>
+                                        <p:tgtEl>
+                                          <p:spTgt spid="29"/>
+                                        </p:tgtEl>
+                                      </p:cBhvr>
+                                    </p:animEffect>
+                                  </p:childTnLst>
+                                </p:cTn>
+                              </p:par>
+                              <p:par>
+                                <p:cTn id="11" presetID="10" presetClass="entr" presetSubtype="0" fill="hold" nodeType="withEffect">
+                                  <p:stCondLst>
+                                    <p:cond delay="600"/>
+                                  </p:stCondLst>
+                                  <p:childTnLst>
+                                    <p:set>
+                                      <p:cBhvr>
+                                        <p:cTn id="12" dur="1" fill="hold">
+                                          <p:stCondLst>
+                                            <p:cond delay="0"/>
+                                          </p:stCondLst>
+                                        </p:cTn>
+                                        <p:tgtEl>
+                                          <p:spTgt spid="30"/>
+                                        </p:tgtEl>
+                                        <p:attrNameLst>
+                                          <p:attrName>style.visibility</p:attrName>
+                                        </p:attrNameLst>
+                                      </p:cBhvr>
+                                      <p:to>
+                                        <p:strVal val="visible"/>
+                                      </p:to>
+                                    </p:set>
+                                    <p:animEffect transition="in" filter="fade">
+                                      <p:cBhvr>
+                                        <p:cTn id="13" dur="500"/>
+                                        <p:tgtEl>
+                                          <p:spTgt spid="30"/>
+                                        </p:tgtEl>
+                                      </p:cBhvr>
+                                    </p:animEffect>
+                                  </p:childTnLst>
+                                </p:cTn>
+                              </p:par>
+                            </p:childTnLst>
+                          </p:cTn>
+                        </p:par>
+                      </p:childTnLst>
+                    </p:cTn>
+                  </p:par>
+                </p:childTnLst>
+              </p:cTn>
+              <p:prevCondLst>
+                <p:cond evt="onPrev" delay="0">
+                  <p:tgtEl>
+                    <p:sldTgt/>
+                  </p:tgtEl>
+                </p:cond>
+              </p:prevCondLst>
+              <p:nextCondLst>
+                <p:cond evt="onNext" delay="0">
+                  <p:tgtEl>
+                    <p:sldTgt/>
+                  </p:tgtEl>
+                </p:cond>
+              </p:nextCondLst>
+            </p:seq>
+          </p:childTnLst>
+        </p:cTn>
+      </p:par>
+    </p:tnLst>
+  </p:timing>
 </p:sld>
 </file>
 
@@ -10417,6 +11327,174 @@
   <p:clrMapOvr>
     <a:masterClrMapping/>
   </p:clrMapOvr>
+  <mc:AlternateContent xmlns:mc="http://schemas.openxmlformats.org/markup-compatibility/2006">
+    <mc:Choice xmlns:p14="http://schemas.microsoft.com/office/powerpoint/2010/main" Requires="p14">
+      <p:transition spd="med" p14:dur="700">
+        <p:fade/>
+      </p:transition>
+    </mc:Choice>
+    <mc:Fallback>
+      <p:transition spd="med">
+        <p:fade/>
+      </p:transition>
+    </mc:Fallback>
+  </mc:AlternateContent>
+  <p:timing>
+    <p:tnLst>
+      <p:par>
+        <p:cTn id="1" dur="indefinite" restart="never" nodeType="tmRoot">
+          <p:childTnLst>
+            <p:seq concurrent="1" nextAc="seek">
+              <p:cTn id="2" dur="indefinite" nodeType="mainSeq">
+                <p:childTnLst>
+                  <p:par>
+                    <p:cTn id="3" fill="hold">
+                      <p:stCondLst>
+                        <p:cond delay="indefinite"/>
+                        <p:cond evt="onBegin" delay="0">
+                          <p:tn val="2"/>
+                        </p:cond>
+                      </p:stCondLst>
+                      <p:childTnLst>
+                        <p:par>
+                          <p:cTn id="4" fill="hold">
+                            <p:stCondLst>
+                              <p:cond delay="0"/>
+                            </p:stCondLst>
+                            <p:childTnLst>
+                              <p:par>
+                                <p:cTn id="5" presetID="10" presetClass="entr" presetSubtype="0" fill="hold" nodeType="afterEffect">
+                                  <p:stCondLst>
+                                    <p:cond delay="0"/>
+                                  </p:stCondLst>
+                                  <p:childTnLst>
+                                    <p:set>
+                                      <p:cBhvr>
+                                        <p:cTn id="6" dur="1" fill="hold">
+                                          <p:stCondLst>
+                                            <p:cond delay="0"/>
+                                          </p:stCondLst>
+                                        </p:cTn>
+                                        <p:tgtEl>
+                                          <p:spTgt spid="4"/>
+                                        </p:tgtEl>
+                                        <p:attrNameLst>
+                                          <p:attrName>style.visibility</p:attrName>
+                                        </p:attrNameLst>
+                                      </p:cBhvr>
+                                      <p:to>
+                                        <p:strVal val="visible"/>
+                                      </p:to>
+                                    </p:set>
+                                    <p:animEffect transition="in" filter="fade">
+                                      <p:cBhvr>
+                                        <p:cTn id="7" dur="500"/>
+                                        <p:tgtEl>
+                                          <p:spTgt spid="4"/>
+                                        </p:tgtEl>
+                                      </p:cBhvr>
+                                    </p:animEffect>
+                                  </p:childTnLst>
+                                </p:cTn>
+                              </p:par>
+                              <p:par>
+                                <p:cTn id="8" presetID="10" presetClass="entr" presetSubtype="0" fill="hold" nodeType="withEffect">
+                                  <p:stCondLst>
+                                    <p:cond delay="300"/>
+                                  </p:stCondLst>
+                                  <p:childTnLst>
+                                    <p:set>
+                                      <p:cBhvr>
+                                        <p:cTn id="9" dur="1" fill="hold">
+                                          <p:stCondLst>
+                                            <p:cond delay="0"/>
+                                          </p:stCondLst>
+                                        </p:cTn>
+                                        <p:tgtEl>
+                                          <p:spTgt spid="125"/>
+                                        </p:tgtEl>
+                                        <p:attrNameLst>
+                                          <p:attrName>style.visibility</p:attrName>
+                                        </p:attrNameLst>
+                                      </p:cBhvr>
+                                      <p:to>
+                                        <p:strVal val="visible"/>
+                                      </p:to>
+                                    </p:set>
+                                    <p:animEffect transition="in" filter="fade">
+                                      <p:cBhvr>
+                                        <p:cTn id="10" dur="500"/>
+                                        <p:tgtEl>
+                                          <p:spTgt spid="125"/>
+                                        </p:tgtEl>
+                                      </p:cBhvr>
+                                    </p:animEffect>
+                                  </p:childTnLst>
+                                </p:cTn>
+                              </p:par>
+                              <p:par>
+                                <p:cTn id="11" presetID="10" presetClass="entr" presetSubtype="0" fill="hold" nodeType="withEffect">
+                                  <p:stCondLst>
+                                    <p:cond delay="600"/>
+                                  </p:stCondLst>
+                                  <p:childTnLst>
+                                    <p:set>
+                                      <p:cBhvr>
+                                        <p:cTn id="12" dur="1" fill="hold">
+                                          <p:stCondLst>
+                                            <p:cond delay="0"/>
+                                          </p:stCondLst>
+                                        </p:cTn>
+                                        <p:tgtEl>
+                                          <p:spTgt spid="126"/>
+                                        </p:tgtEl>
+                                        <p:attrNameLst>
+                                          <p:attrName>style.visibility</p:attrName>
+                                        </p:attrNameLst>
+                                      </p:cBhvr>
+                                      <p:to>
+                                        <p:strVal val="visible"/>
+                                      </p:to>
+                                    </p:set>
+                                    <p:animEffect transition="in" filter="fade">
+                                      <p:cBhvr>
+                                        <p:cTn id="13" dur="500"/>
+                                        <p:tgtEl>
+                                          <p:spTgt spid="126"/>
+                                        </p:tgtEl>
+                                      </p:cBhvr>
+                                    </p:animEffect>
+                                  </p:childTnLst>
+                                </p:cTn>
+                              </p:par>
+                            </p:childTnLst>
+                          </p:cTn>
+                        </p:par>
+                      </p:childTnLst>
+                    </p:cTn>
+                  </p:par>
+                </p:childTnLst>
+              </p:cTn>
+              <p:prevCondLst>
+                <p:cond evt="onPrev" delay="0">
+                  <p:tgtEl>
+                    <p:sldTgt/>
+                  </p:tgtEl>
+                </p:cond>
+              </p:prevCondLst>
+              <p:nextCondLst>
+                <p:cond evt="onNext" delay="0">
+                  <p:tgtEl>
+                    <p:sldTgt/>
+                  </p:tgtEl>
+                </p:cond>
+              </p:nextCondLst>
+            </p:seq>
+          </p:childTnLst>
+        </p:cTn>
+      </p:par>
+    </p:tnLst>
+  </p:timing>
 </p:sld>
 </file>
 
@@ -13081,6 +14159,174 @@
   <p:clrMapOvr>
     <a:masterClrMapping/>
   </p:clrMapOvr>
+  <mc:AlternateContent xmlns:mc="http://schemas.openxmlformats.org/markup-compatibility/2006">
+    <mc:Choice xmlns:p14="http://schemas.microsoft.com/office/powerpoint/2010/main" Requires="p14">
+      <p:transition spd="med" p14:dur="700">
+        <p:fade/>
+      </p:transition>
+    </mc:Choice>
+    <mc:Fallback>
+      <p:transition spd="med">
+        <p:fade/>
+      </p:transition>
+    </mc:Fallback>
+  </mc:AlternateContent>
+  <p:timing>
+    <p:tnLst>
+      <p:par>
+        <p:cTn id="1" dur="indefinite" restart="never" nodeType="tmRoot">
+          <p:childTnLst>
+            <p:seq concurrent="1" nextAc="seek">
+              <p:cTn id="2" dur="indefinite" nodeType="mainSeq">
+                <p:childTnLst>
+                  <p:par>
+                    <p:cTn id="3" fill="hold">
+                      <p:stCondLst>
+                        <p:cond delay="indefinite"/>
+                        <p:cond evt="onBegin" delay="0">
+                          <p:tn val="2"/>
+                        </p:cond>
+                      </p:stCondLst>
+                      <p:childTnLst>
+                        <p:par>
+                          <p:cTn id="4" fill="hold">
+                            <p:stCondLst>
+                              <p:cond delay="0"/>
+                            </p:stCondLst>
+                            <p:childTnLst>
+                              <p:par>
+                                <p:cTn id="5" presetID="10" presetClass="entr" presetSubtype="0" fill="hold" nodeType="afterEffect">
+                                  <p:stCondLst>
+                                    <p:cond delay="0"/>
+                                  </p:stCondLst>
+                                  <p:childTnLst>
+                                    <p:set>
+                                      <p:cBhvr>
+                                        <p:cTn id="6" dur="1" fill="hold">
+                                          <p:stCondLst>
+                                            <p:cond delay="0"/>
+                                          </p:stCondLst>
+                                        </p:cTn>
+                                        <p:tgtEl>
+                                          <p:spTgt spid="4"/>
+                                        </p:tgtEl>
+                                        <p:attrNameLst>
+                                          <p:attrName>style.visibility</p:attrName>
+                                        </p:attrNameLst>
+                                      </p:cBhvr>
+                                      <p:to>
+                                        <p:strVal val="visible"/>
+                                      </p:to>
+                                    </p:set>
+                                    <p:animEffect transition="in" filter="fade">
+                                      <p:cBhvr>
+                                        <p:cTn id="7" dur="500"/>
+                                        <p:tgtEl>
+                                          <p:spTgt spid="4"/>
+                                        </p:tgtEl>
+                                      </p:cBhvr>
+                                    </p:animEffect>
+                                  </p:childTnLst>
+                                </p:cTn>
+                              </p:par>
+                              <p:par>
+                                <p:cTn id="8" presetID="10" presetClass="entr" presetSubtype="0" fill="hold" nodeType="withEffect">
+                                  <p:stCondLst>
+                                    <p:cond delay="300"/>
+                                  </p:stCondLst>
+                                  <p:childTnLst>
+                                    <p:set>
+                                      <p:cBhvr>
+                                        <p:cTn id="9" dur="1" fill="hold">
+                                          <p:stCondLst>
+                                            <p:cond delay="0"/>
+                                          </p:stCondLst>
+                                        </p:cTn>
+                                        <p:tgtEl>
+                                          <p:spTgt spid="84"/>
+                                        </p:tgtEl>
+                                        <p:attrNameLst>
+                                          <p:attrName>style.visibility</p:attrName>
+                                        </p:attrNameLst>
+                                      </p:cBhvr>
+                                      <p:to>
+                                        <p:strVal val="visible"/>
+                                      </p:to>
+                                    </p:set>
+                                    <p:animEffect transition="in" filter="fade">
+                                      <p:cBhvr>
+                                        <p:cTn id="10" dur="500"/>
+                                        <p:tgtEl>
+                                          <p:spTgt spid="84"/>
+                                        </p:tgtEl>
+                                      </p:cBhvr>
+                                    </p:animEffect>
+                                  </p:childTnLst>
+                                </p:cTn>
+                              </p:par>
+                              <p:par>
+                                <p:cTn id="11" presetID="10" presetClass="entr" presetSubtype="0" fill="hold" nodeType="withEffect">
+                                  <p:stCondLst>
+                                    <p:cond delay="600"/>
+                                  </p:stCondLst>
+                                  <p:childTnLst>
+                                    <p:set>
+                                      <p:cBhvr>
+                                        <p:cTn id="12" dur="1" fill="hold">
+                                          <p:stCondLst>
+                                            <p:cond delay="0"/>
+                                          </p:stCondLst>
+                                        </p:cTn>
+                                        <p:tgtEl>
+                                          <p:spTgt spid="85"/>
+                                        </p:tgtEl>
+                                        <p:attrNameLst>
+                                          <p:attrName>style.visibility</p:attrName>
+                                        </p:attrNameLst>
+                                      </p:cBhvr>
+                                      <p:to>
+                                        <p:strVal val="visible"/>
+                                      </p:to>
+                                    </p:set>
+                                    <p:animEffect transition="in" filter="fade">
+                                      <p:cBhvr>
+                                        <p:cTn id="13" dur="500"/>
+                                        <p:tgtEl>
+                                          <p:spTgt spid="85"/>
+                                        </p:tgtEl>
+                                      </p:cBhvr>
+                                    </p:animEffect>
+                                  </p:childTnLst>
+                                </p:cTn>
+                              </p:par>
+                            </p:childTnLst>
+                          </p:cTn>
+                        </p:par>
+                      </p:childTnLst>
+                    </p:cTn>
+                  </p:par>
+                </p:childTnLst>
+              </p:cTn>
+              <p:prevCondLst>
+                <p:cond evt="onPrev" delay="0">
+                  <p:tgtEl>
+                    <p:sldTgt/>
+                  </p:tgtEl>
+                </p:cond>
+              </p:prevCondLst>
+              <p:nextCondLst>
+                <p:cond evt="onNext" delay="0">
+                  <p:tgtEl>
+                    <p:sldTgt/>
+                  </p:tgtEl>
+                </p:cond>
+              </p:nextCondLst>
+            </p:seq>
+          </p:childTnLst>
+        </p:cTn>
+      </p:par>
+    </p:tnLst>
+  </p:timing>
 </p:sld>
 </file>
 
@@ -15181,6 +16427,174 @@
   <p:clrMapOvr>
     <a:masterClrMapping/>
   </p:clrMapOvr>
+  <mc:AlternateContent xmlns:mc="http://schemas.openxmlformats.org/markup-compatibility/2006">
+    <mc:Choice xmlns:p14="http://schemas.microsoft.com/office/powerpoint/2010/main" Requires="p14">
+      <p:transition spd="med" p14:dur="700">
+        <p:fade/>
+      </p:transition>
+    </mc:Choice>
+    <mc:Fallback>
+      <p:transition spd="med">
+        <p:fade/>
+      </p:transition>
+    </mc:Fallback>
+  </mc:AlternateContent>
+  <p:timing>
+    <p:tnLst>
+      <p:par>
+        <p:cTn id="1" dur="indefinite" restart="never" nodeType="tmRoot">
+          <p:childTnLst>
+            <p:seq concurrent="1" nextAc="seek">
+              <p:cTn id="2" dur="indefinite" nodeType="mainSeq">
+                <p:childTnLst>
+                  <p:par>
+                    <p:cTn id="3" fill="hold">
+                      <p:stCondLst>
+                        <p:cond delay="indefinite"/>
+                        <p:cond evt="onBegin" delay="0">
+                          <p:tn val="2"/>
+                        </p:cond>
+                      </p:stCondLst>
+                      <p:childTnLst>
+                        <p:par>
+                          <p:cTn id="4" fill="hold">
+                            <p:stCondLst>
+                              <p:cond delay="0"/>
+                            </p:stCondLst>
+                            <p:childTnLst>
+                              <p:par>
+                                <p:cTn id="5" presetID="10" presetClass="entr" presetSubtype="0" fill="hold" nodeType="afterEffect">
+                                  <p:stCondLst>
+                                    <p:cond delay="0"/>
+                                  </p:stCondLst>
+                                  <p:childTnLst>
+                                    <p:set>
+                                      <p:cBhvr>
+                                        <p:cTn id="6" dur="1" fill="hold">
+                                          <p:stCondLst>
+                                            <p:cond delay="0"/>
+                                          </p:stCondLst>
+                                        </p:cTn>
+                                        <p:tgtEl>
+                                          <p:spTgt spid="4"/>
+                                        </p:tgtEl>
+                                        <p:attrNameLst>
+                                          <p:attrName>style.visibility</p:attrName>
+                                        </p:attrNameLst>
+                                      </p:cBhvr>
+                                      <p:to>
+                                        <p:strVal val="visible"/>
+                                      </p:to>
+                                    </p:set>
+                                    <p:animEffect transition="in" filter="fade">
+                                      <p:cBhvr>
+                                        <p:cTn id="7" dur="500"/>
+                                        <p:tgtEl>
+                                          <p:spTgt spid="4"/>
+                                        </p:tgtEl>
+                                      </p:cBhvr>
+                                    </p:animEffect>
+                                  </p:childTnLst>
+                                </p:cTn>
+                              </p:par>
+                              <p:par>
+                                <p:cTn id="8" presetID="10" presetClass="entr" presetSubtype="0" fill="hold" nodeType="withEffect">
+                                  <p:stCondLst>
+                                    <p:cond delay="300"/>
+                                  </p:stCondLst>
+                                  <p:childTnLst>
+                                    <p:set>
+                                      <p:cBhvr>
+                                        <p:cTn id="9" dur="1" fill="hold">
+                                          <p:stCondLst>
+                                            <p:cond delay="0"/>
+                                          </p:stCondLst>
+                                        </p:cTn>
+                                        <p:tgtEl>
+                                          <p:spTgt spid="70"/>
+                                        </p:tgtEl>
+                                        <p:attrNameLst>
+                                          <p:attrName>style.visibility</p:attrName>
+                                        </p:attrNameLst>
+                                      </p:cBhvr>
+                                      <p:to>
+                                        <p:strVal val="visible"/>
+                                      </p:to>
+                                    </p:set>
+                                    <p:animEffect transition="in" filter="fade">
+                                      <p:cBhvr>
+                                        <p:cTn id="10" dur="500"/>
+                                        <p:tgtEl>
+                                          <p:spTgt spid="70"/>
+                                        </p:tgtEl>
+                                      </p:cBhvr>
+                                    </p:animEffect>
+                                  </p:childTnLst>
+                                </p:cTn>
+                              </p:par>
+                              <p:par>
+                                <p:cTn id="11" presetID="10" presetClass="entr" presetSubtype="0" fill="hold" nodeType="withEffect">
+                                  <p:stCondLst>
+                                    <p:cond delay="600"/>
+                                  </p:stCondLst>
+                                  <p:childTnLst>
+                                    <p:set>
+                                      <p:cBhvr>
+                                        <p:cTn id="12" dur="1" fill="hold">
+                                          <p:stCondLst>
+                                            <p:cond delay="0"/>
+                                          </p:stCondLst>
+                                        </p:cTn>
+                                        <p:tgtEl>
+                                          <p:spTgt spid="71"/>
+                                        </p:tgtEl>
+                                        <p:attrNameLst>
+                                          <p:attrName>style.visibility</p:attrName>
+                                        </p:attrNameLst>
+                                      </p:cBhvr>
+                                      <p:to>
+                                        <p:strVal val="visible"/>
+                                      </p:to>
+                                    </p:set>
+                                    <p:animEffect transition="in" filter="fade">
+                                      <p:cBhvr>
+                                        <p:cTn id="13" dur="500"/>
+                                        <p:tgtEl>
+                                          <p:spTgt spid="71"/>
+                                        </p:tgtEl>
+                                      </p:cBhvr>
+                                    </p:animEffect>
+                                  </p:childTnLst>
+                                </p:cTn>
+                              </p:par>
+                            </p:childTnLst>
+                          </p:cTn>
+                        </p:par>
+                      </p:childTnLst>
+                    </p:cTn>
+                  </p:par>
+                </p:childTnLst>
+              </p:cTn>
+              <p:prevCondLst>
+                <p:cond evt="onPrev" delay="0">
+                  <p:tgtEl>
+                    <p:sldTgt/>
+                  </p:tgtEl>
+                </p:cond>
+              </p:prevCondLst>
+              <p:nextCondLst>
+                <p:cond evt="onNext" delay="0">
+                  <p:tgtEl>
+                    <p:sldTgt/>
+                  </p:tgtEl>
+                </p:cond>
+              </p:nextCondLst>
+            </p:seq>
+          </p:childTnLst>
+        </p:cTn>
+      </p:par>
+    </p:tnLst>
+  </p:timing>
 </p:sld>
 </file>
 
@@ -16195,6 +17609,174 @@
   <p:clrMapOvr>
     <a:masterClrMapping/>
   </p:clrMapOvr>
+  <mc:AlternateContent xmlns:mc="http://schemas.openxmlformats.org/markup-compatibility/2006">
+    <mc:Choice xmlns:p14="http://schemas.microsoft.com/office/powerpoint/2010/main" Requires="p14">
+      <p:transition spd="med" p14:dur="700">
+        <p:fade/>
+      </p:transition>
+    </mc:Choice>
+    <mc:Fallback>
+      <p:transition spd="med">
+        <p:fade/>
+      </p:transition>
+    </mc:Fallback>
+  </mc:AlternateContent>
+  <p:timing>
+    <p:tnLst>
+      <p:par>
+        <p:cTn id="1" dur="indefinite" restart="never" nodeType="tmRoot">
+          <p:childTnLst>
+            <p:seq concurrent="1" nextAc="seek">
+              <p:cTn id="2" dur="indefinite" nodeType="mainSeq">
+                <p:childTnLst>
+                  <p:par>
+                    <p:cTn id="3" fill="hold">
+                      <p:stCondLst>
+                        <p:cond delay="indefinite"/>
+                        <p:cond evt="onBegin" delay="0">
+                          <p:tn val="2"/>
+                        </p:cond>
+                      </p:stCondLst>
+                      <p:childTnLst>
+                        <p:par>
+                          <p:cTn id="4" fill="hold">
+                            <p:stCondLst>
+                              <p:cond delay="0"/>
+                            </p:stCondLst>
+                            <p:childTnLst>
+                              <p:par>
+                                <p:cTn id="5" presetID="10" presetClass="entr" presetSubtype="0" fill="hold" nodeType="afterEffect">
+                                  <p:stCondLst>
+                                    <p:cond delay="0"/>
+                                  </p:stCondLst>
+                                  <p:childTnLst>
+                                    <p:set>
+                                      <p:cBhvr>
+                                        <p:cTn id="6" dur="1" fill="hold">
+                                          <p:stCondLst>
+                                            <p:cond delay="0"/>
+                                          </p:stCondLst>
+                                        </p:cTn>
+                                        <p:tgtEl>
+                                          <p:spTgt spid="4"/>
+                                        </p:tgtEl>
+                                        <p:attrNameLst>
+                                          <p:attrName>style.visibility</p:attrName>
+                                        </p:attrNameLst>
+                                      </p:cBhvr>
+                                      <p:to>
+                                        <p:strVal val="visible"/>
+                                      </p:to>
+                                    </p:set>
+                                    <p:animEffect transition="in" filter="fade">
+                                      <p:cBhvr>
+                                        <p:cTn id="7" dur="500"/>
+                                        <p:tgtEl>
+                                          <p:spTgt spid="4"/>
+                                        </p:tgtEl>
+                                      </p:cBhvr>
+                                    </p:animEffect>
+                                  </p:childTnLst>
+                                </p:cTn>
+                              </p:par>
+                              <p:par>
+                                <p:cTn id="8" presetID="10" presetClass="entr" presetSubtype="0" fill="hold" nodeType="withEffect">
+                                  <p:stCondLst>
+                                    <p:cond delay="300"/>
+                                  </p:stCondLst>
+                                  <p:childTnLst>
+                                    <p:set>
+                                      <p:cBhvr>
+                                        <p:cTn id="9" dur="1" fill="hold">
+                                          <p:stCondLst>
+                                            <p:cond delay="0"/>
+                                          </p:stCondLst>
+                                        </p:cTn>
+                                        <p:tgtEl>
+                                          <p:spTgt spid="30"/>
+                                        </p:tgtEl>
+                                        <p:attrNameLst>
+                                          <p:attrName>style.visibility</p:attrName>
+                                        </p:attrNameLst>
+                                      </p:cBhvr>
+                                      <p:to>
+                                        <p:strVal val="visible"/>
+                                      </p:to>
+                                    </p:set>
+                                    <p:animEffect transition="in" filter="fade">
+                                      <p:cBhvr>
+                                        <p:cTn id="10" dur="500"/>
+                                        <p:tgtEl>
+                                          <p:spTgt spid="30"/>
+                                        </p:tgtEl>
+                                      </p:cBhvr>
+                                    </p:animEffect>
+                                  </p:childTnLst>
+                                </p:cTn>
+                              </p:par>
+                              <p:par>
+                                <p:cTn id="11" presetID="10" presetClass="entr" presetSubtype="0" fill="hold" nodeType="withEffect">
+                                  <p:stCondLst>
+                                    <p:cond delay="600"/>
+                                  </p:stCondLst>
+                                  <p:childTnLst>
+                                    <p:set>
+                                      <p:cBhvr>
+                                        <p:cTn id="12" dur="1" fill="hold">
+                                          <p:stCondLst>
+                                            <p:cond delay="0"/>
+                                          </p:stCondLst>
+                                        </p:cTn>
+                                        <p:tgtEl>
+                                          <p:spTgt spid="31"/>
+                                        </p:tgtEl>
+                                        <p:attrNameLst>
+                                          <p:attrName>style.visibility</p:attrName>
+                                        </p:attrNameLst>
+                                      </p:cBhvr>
+                                      <p:to>
+                                        <p:strVal val="visible"/>
+                                      </p:to>
+                                    </p:set>
+                                    <p:animEffect transition="in" filter="fade">
+                                      <p:cBhvr>
+                                        <p:cTn id="13" dur="500"/>
+                                        <p:tgtEl>
+                                          <p:spTgt spid="31"/>
+                                        </p:tgtEl>
+                                      </p:cBhvr>
+                                    </p:animEffect>
+                                  </p:childTnLst>
+                                </p:cTn>
+                              </p:par>
+                            </p:childTnLst>
+                          </p:cTn>
+                        </p:par>
+                      </p:childTnLst>
+                    </p:cTn>
+                  </p:par>
+                </p:childTnLst>
+              </p:cTn>
+              <p:prevCondLst>
+                <p:cond evt="onPrev" delay="0">
+                  <p:tgtEl>
+                    <p:sldTgt/>
+                  </p:tgtEl>
+                </p:cond>
+              </p:prevCondLst>
+              <p:nextCondLst>
+                <p:cond evt="onNext" delay="0">
+                  <p:tgtEl>
+                    <p:sldTgt/>
+                  </p:tgtEl>
+                </p:cond>
+              </p:nextCondLst>
+            </p:seq>
+          </p:childTnLst>
+        </p:cTn>
+      </p:par>
+    </p:tnLst>
+  </p:timing>
 </p:sld>
 </file>
 
@@ -19321,6 +20903,174 @@
   <p:clrMapOvr>
     <a:masterClrMapping/>
   </p:clrMapOvr>
+  <mc:AlternateContent xmlns:mc="http://schemas.openxmlformats.org/markup-compatibility/2006">
+    <mc:Choice xmlns:p14="http://schemas.microsoft.com/office/powerpoint/2010/main" Requires="p14">
+      <p:transition spd="med" p14:dur="700">
+        <p:fade/>
+      </p:transition>
+    </mc:Choice>
+    <mc:Fallback>
+      <p:transition spd="med">
+        <p:fade/>
+      </p:transition>
+    </mc:Fallback>
+  </mc:AlternateContent>
+  <p:timing>
+    <p:tnLst>
+      <p:par>
+        <p:cTn id="1" dur="indefinite" restart="never" nodeType="tmRoot">
+          <p:childTnLst>
+            <p:seq concurrent="1" nextAc="seek">
+              <p:cTn id="2" dur="indefinite" nodeType="mainSeq">
+                <p:childTnLst>
+                  <p:par>
+                    <p:cTn id="3" fill="hold">
+                      <p:stCondLst>
+                        <p:cond delay="indefinite"/>
+                        <p:cond evt="onBegin" delay="0">
+                          <p:tn val="2"/>
+                        </p:cond>
+                      </p:stCondLst>
+                      <p:childTnLst>
+                        <p:par>
+                          <p:cTn id="4" fill="hold">
+                            <p:stCondLst>
+                              <p:cond delay="0"/>
+                            </p:stCondLst>
+                            <p:childTnLst>
+                              <p:par>
+                                <p:cTn id="5" presetID="10" presetClass="entr" presetSubtype="0" fill="hold" nodeType="afterEffect">
+                                  <p:stCondLst>
+                                    <p:cond delay="0"/>
+                                  </p:stCondLst>
+                                  <p:childTnLst>
+                                    <p:set>
+                                      <p:cBhvr>
+                                        <p:cTn id="6" dur="1" fill="hold">
+                                          <p:stCondLst>
+                                            <p:cond delay="0"/>
+                                          </p:stCondLst>
+                                        </p:cTn>
+                                        <p:tgtEl>
+                                          <p:spTgt spid="4"/>
+                                        </p:tgtEl>
+                                        <p:attrNameLst>
+                                          <p:attrName>style.visibility</p:attrName>
+                                        </p:attrNameLst>
+                                      </p:cBhvr>
+                                      <p:to>
+                                        <p:strVal val="visible"/>
+                                      </p:to>
+                                    </p:set>
+                                    <p:animEffect transition="in" filter="fade">
+                                      <p:cBhvr>
+                                        <p:cTn id="7" dur="500"/>
+                                        <p:tgtEl>
+                                          <p:spTgt spid="4"/>
+                                        </p:tgtEl>
+                                      </p:cBhvr>
+                                    </p:animEffect>
+                                  </p:childTnLst>
+                                </p:cTn>
+                              </p:par>
+                              <p:par>
+                                <p:cTn id="8" presetID="10" presetClass="entr" presetSubtype="0" fill="hold" nodeType="withEffect">
+                                  <p:stCondLst>
+                                    <p:cond delay="300"/>
+                                  </p:stCondLst>
+                                  <p:childTnLst>
+                                    <p:set>
+                                      <p:cBhvr>
+                                        <p:cTn id="9" dur="1" fill="hold">
+                                          <p:stCondLst>
+                                            <p:cond delay="0"/>
+                                          </p:stCondLst>
+                                        </p:cTn>
+                                        <p:tgtEl>
+                                          <p:spTgt spid="95"/>
+                                        </p:tgtEl>
+                                        <p:attrNameLst>
+                                          <p:attrName>style.visibility</p:attrName>
+                                        </p:attrNameLst>
+                                      </p:cBhvr>
+                                      <p:to>
+                                        <p:strVal val="visible"/>
+                                      </p:to>
+                                    </p:set>
+                                    <p:animEffect transition="in" filter="fade">
+                                      <p:cBhvr>
+                                        <p:cTn id="10" dur="500"/>
+                                        <p:tgtEl>
+                                          <p:spTgt spid="95"/>
+                                        </p:tgtEl>
+                                      </p:cBhvr>
+                                    </p:animEffect>
+                                  </p:childTnLst>
+                                </p:cTn>
+                              </p:par>
+                              <p:par>
+                                <p:cTn id="11" presetID="10" presetClass="entr" presetSubtype="0" fill="hold" nodeType="withEffect">
+                                  <p:stCondLst>
+                                    <p:cond delay="600"/>
+                                  </p:stCondLst>
+                                  <p:childTnLst>
+                                    <p:set>
+                                      <p:cBhvr>
+                                        <p:cTn id="12" dur="1" fill="hold">
+                                          <p:stCondLst>
+                                            <p:cond delay="0"/>
+                                          </p:stCondLst>
+                                        </p:cTn>
+                                        <p:tgtEl>
+                                          <p:spTgt spid="96"/>
+                                        </p:tgtEl>
+                                        <p:attrNameLst>
+                                          <p:attrName>style.visibility</p:attrName>
+                                        </p:attrNameLst>
+                                      </p:cBhvr>
+                                      <p:to>
+                                        <p:strVal val="visible"/>
+                                      </p:to>
+                                    </p:set>
+                                    <p:animEffect transition="in" filter="fade">
+                                      <p:cBhvr>
+                                        <p:cTn id="13" dur="500"/>
+                                        <p:tgtEl>
+                                          <p:spTgt spid="96"/>
+                                        </p:tgtEl>
+                                      </p:cBhvr>
+                                    </p:animEffect>
+                                  </p:childTnLst>
+                                </p:cTn>
+                              </p:par>
+                            </p:childTnLst>
+                          </p:cTn>
+                        </p:par>
+                      </p:childTnLst>
+                    </p:cTn>
+                  </p:par>
+                </p:childTnLst>
+              </p:cTn>
+              <p:prevCondLst>
+                <p:cond evt="onPrev" delay="0">
+                  <p:tgtEl>
+                    <p:sldTgt/>
+                  </p:tgtEl>
+                </p:cond>
+              </p:prevCondLst>
+              <p:nextCondLst>
+                <p:cond evt="onNext" delay="0">
+                  <p:tgtEl>
+                    <p:sldTgt/>
+                  </p:tgtEl>
+                </p:cond>
+              </p:nextCondLst>
+            </p:seq>
+          </p:childTnLst>
+        </p:cTn>
+      </p:par>
+    </p:tnLst>
+  </p:timing>
 </p:sld>
 </file>
 
@@ -20950,6 +22700,174 @@
   <p:clrMapOvr>
     <a:masterClrMapping/>
   </p:clrMapOvr>
+  <mc:AlternateContent xmlns:mc="http://schemas.openxmlformats.org/markup-compatibility/2006">
+    <mc:Choice xmlns:p14="http://schemas.microsoft.com/office/powerpoint/2010/main" Requires="p14">
+      <p:transition spd="med" p14:dur="700">
+        <p:fade/>
+      </p:transition>
+    </mc:Choice>
+    <mc:Fallback>
+      <p:transition spd="med">
+        <p:fade/>
+      </p:transition>
+    </mc:Fallback>
+  </mc:AlternateContent>
+  <p:timing>
+    <p:tnLst>
+      <p:par>
+        <p:cTn id="1" dur="indefinite" restart="never" nodeType="tmRoot">
+          <p:childTnLst>
+            <p:seq concurrent="1" nextAc="seek">
+              <p:cTn id="2" dur="indefinite" nodeType="mainSeq">
+                <p:childTnLst>
+                  <p:par>
+                    <p:cTn id="3" fill="hold">
+                      <p:stCondLst>
+                        <p:cond delay="indefinite"/>
+                        <p:cond evt="onBegin" delay="0">
+                          <p:tn val="2"/>
+                        </p:cond>
+                      </p:stCondLst>
+                      <p:childTnLst>
+                        <p:par>
+                          <p:cTn id="4" fill="hold">
+                            <p:stCondLst>
+                              <p:cond delay="0"/>
+                            </p:stCondLst>
+                            <p:childTnLst>
+                              <p:par>
+                                <p:cTn id="5" presetID="10" presetClass="entr" presetSubtype="0" fill="hold" nodeType="afterEffect">
+                                  <p:stCondLst>
+                                    <p:cond delay="0"/>
+                                  </p:stCondLst>
+                                  <p:childTnLst>
+                                    <p:set>
+                                      <p:cBhvr>
+                                        <p:cTn id="6" dur="1" fill="hold">
+                                          <p:stCondLst>
+                                            <p:cond delay="0"/>
+                                          </p:stCondLst>
+                                        </p:cTn>
+                                        <p:tgtEl>
+                                          <p:spTgt spid="4"/>
+                                        </p:tgtEl>
+                                        <p:attrNameLst>
+                                          <p:attrName>style.visibility</p:attrName>
+                                        </p:attrNameLst>
+                                      </p:cBhvr>
+                                      <p:to>
+                                        <p:strVal val="visible"/>
+                                      </p:to>
+                                    </p:set>
+                                    <p:animEffect transition="in" filter="fade">
+                                      <p:cBhvr>
+                                        <p:cTn id="7" dur="500"/>
+                                        <p:tgtEl>
+                                          <p:spTgt spid="4"/>
+                                        </p:tgtEl>
+                                      </p:cBhvr>
+                                    </p:animEffect>
+                                  </p:childTnLst>
+                                </p:cTn>
+                              </p:par>
+                              <p:par>
+                                <p:cTn id="8" presetID="10" presetClass="entr" presetSubtype="0" fill="hold" nodeType="withEffect">
+                                  <p:stCondLst>
+                                    <p:cond delay="300"/>
+                                  </p:stCondLst>
+                                  <p:childTnLst>
+                                    <p:set>
+                                      <p:cBhvr>
+                                        <p:cTn id="9" dur="1" fill="hold">
+                                          <p:stCondLst>
+                                            <p:cond delay="0"/>
+                                          </p:stCondLst>
+                                        </p:cTn>
+                                        <p:tgtEl>
+                                          <p:spTgt spid="51"/>
+                                        </p:tgtEl>
+                                        <p:attrNameLst>
+                                          <p:attrName>style.visibility</p:attrName>
+                                        </p:attrNameLst>
+                                      </p:cBhvr>
+                                      <p:to>
+                                        <p:strVal val="visible"/>
+                                      </p:to>
+                                    </p:set>
+                                    <p:animEffect transition="in" filter="fade">
+                                      <p:cBhvr>
+                                        <p:cTn id="10" dur="500"/>
+                                        <p:tgtEl>
+                                          <p:spTgt spid="51"/>
+                                        </p:tgtEl>
+                                      </p:cBhvr>
+                                    </p:animEffect>
+                                  </p:childTnLst>
+                                </p:cTn>
+                              </p:par>
+                              <p:par>
+                                <p:cTn id="11" presetID="10" presetClass="entr" presetSubtype="0" fill="hold" nodeType="withEffect">
+                                  <p:stCondLst>
+                                    <p:cond delay="600"/>
+                                  </p:stCondLst>
+                                  <p:childTnLst>
+                                    <p:set>
+                                      <p:cBhvr>
+                                        <p:cTn id="12" dur="1" fill="hold">
+                                          <p:stCondLst>
+                                            <p:cond delay="0"/>
+                                          </p:stCondLst>
+                                        </p:cTn>
+                                        <p:tgtEl>
+                                          <p:spTgt spid="52"/>
+                                        </p:tgtEl>
+                                        <p:attrNameLst>
+                                          <p:attrName>style.visibility</p:attrName>
+                                        </p:attrNameLst>
+                                      </p:cBhvr>
+                                      <p:to>
+                                        <p:strVal val="visible"/>
+                                      </p:to>
+                                    </p:set>
+                                    <p:animEffect transition="in" filter="fade">
+                                      <p:cBhvr>
+                                        <p:cTn id="13" dur="500"/>
+                                        <p:tgtEl>
+                                          <p:spTgt spid="52"/>
+                                        </p:tgtEl>
+                                      </p:cBhvr>
+                                    </p:animEffect>
+                                  </p:childTnLst>
+                                </p:cTn>
+                              </p:par>
+                            </p:childTnLst>
+                          </p:cTn>
+                        </p:par>
+                      </p:childTnLst>
+                    </p:cTn>
+                  </p:par>
+                </p:childTnLst>
+              </p:cTn>
+              <p:prevCondLst>
+                <p:cond evt="onPrev" delay="0">
+                  <p:tgtEl>
+                    <p:sldTgt/>
+                  </p:tgtEl>
+                </p:cond>
+              </p:prevCondLst>
+              <p:nextCondLst>
+                <p:cond evt="onNext" delay="0">
+                  <p:tgtEl>
+                    <p:sldTgt/>
+                  </p:tgtEl>
+                </p:cond>
+              </p:nextCondLst>
+            </p:seq>
+          </p:childTnLst>
+        </p:cTn>
+      </p:par>
+    </p:tnLst>
+  </p:timing>
 </p:sld>
 </file>
 
@@ -21670,6 +23588,174 @@
   <p:clrMapOvr>
     <a:masterClrMapping/>
   </p:clrMapOvr>
+  <mc:AlternateContent xmlns:mc="http://schemas.openxmlformats.org/markup-compatibility/2006">
+    <mc:Choice xmlns:p14="http://schemas.microsoft.com/office/powerpoint/2010/main" Requires="p14">
+      <p:transition spd="med" p14:dur="700">
+        <p:fade/>
+      </p:transition>
+    </mc:Choice>
+    <mc:Fallback>
+      <p:transition spd="med">
+        <p:fade/>
+      </p:transition>
+    </mc:Fallback>
+  </mc:AlternateContent>
+  <p:timing>
+    <p:tnLst>
+      <p:par>
+        <p:cTn id="1" dur="indefinite" restart="never" nodeType="tmRoot">
+          <p:childTnLst>
+            <p:seq concurrent="1" nextAc="seek">
+              <p:cTn id="2" dur="indefinite" nodeType="mainSeq">
+                <p:childTnLst>
+                  <p:par>
+                    <p:cTn id="3" fill="hold">
+                      <p:stCondLst>
+                        <p:cond delay="indefinite"/>
+                        <p:cond evt="onBegin" delay="0">
+                          <p:tn val="2"/>
+                        </p:cond>
+                      </p:stCondLst>
+                      <p:childTnLst>
+                        <p:par>
+                          <p:cTn id="4" fill="hold">
+                            <p:stCondLst>
+                              <p:cond delay="0"/>
+                            </p:stCondLst>
+                            <p:childTnLst>
+                              <p:par>
+                                <p:cTn id="5" presetID="10" presetClass="entr" presetSubtype="0" fill="hold" nodeType="afterEffect">
+                                  <p:stCondLst>
+                                    <p:cond delay="0"/>
+                                  </p:stCondLst>
+                                  <p:childTnLst>
+                                    <p:set>
+                                      <p:cBhvr>
+                                        <p:cTn id="6" dur="1" fill="hold">
+                                          <p:stCondLst>
+                                            <p:cond delay="0"/>
+                                          </p:stCondLst>
+                                        </p:cTn>
+                                        <p:tgtEl>
+                                          <p:spTgt spid="3"/>
+                                        </p:tgtEl>
+                                        <p:attrNameLst>
+                                          <p:attrName>style.visibility</p:attrName>
+                                        </p:attrNameLst>
+                                      </p:cBhvr>
+                                      <p:to>
+                                        <p:strVal val="visible"/>
+                                      </p:to>
+                                    </p:set>
+                                    <p:animEffect transition="in" filter="fade">
+                                      <p:cBhvr>
+                                        <p:cTn id="7" dur="500"/>
+                                        <p:tgtEl>
+                                          <p:spTgt spid="3"/>
+                                        </p:tgtEl>
+                                      </p:cBhvr>
+                                    </p:animEffect>
+                                  </p:childTnLst>
+                                </p:cTn>
+                              </p:par>
+                              <p:par>
+                                <p:cTn id="8" presetID="10" presetClass="entr" presetSubtype="0" fill="hold" nodeType="withEffect">
+                                  <p:stCondLst>
+                                    <p:cond delay="300"/>
+                                  </p:stCondLst>
+                                  <p:childTnLst>
+                                    <p:set>
+                                      <p:cBhvr>
+                                        <p:cTn id="9" dur="1" fill="hold">
+                                          <p:stCondLst>
+                                            <p:cond delay="0"/>
+                                          </p:stCondLst>
+                                        </p:cTn>
+                                        <p:tgtEl>
+                                          <p:spTgt spid="19"/>
+                                        </p:tgtEl>
+                                        <p:attrNameLst>
+                                          <p:attrName>style.visibility</p:attrName>
+                                        </p:attrNameLst>
+                                      </p:cBhvr>
+                                      <p:to>
+                                        <p:strVal val="visible"/>
+                                      </p:to>
+                                    </p:set>
+                                    <p:animEffect transition="in" filter="fade">
+                                      <p:cBhvr>
+                                        <p:cTn id="10" dur="500"/>
+                                        <p:tgtEl>
+                                          <p:spTgt spid="19"/>
+                                        </p:tgtEl>
+                                      </p:cBhvr>
+                                    </p:animEffect>
+                                  </p:childTnLst>
+                                </p:cTn>
+                              </p:par>
+                              <p:par>
+                                <p:cTn id="11" presetID="10" presetClass="entr" presetSubtype="0" fill="hold" nodeType="withEffect">
+                                  <p:stCondLst>
+                                    <p:cond delay="600"/>
+                                  </p:stCondLst>
+                                  <p:childTnLst>
+                                    <p:set>
+                                      <p:cBhvr>
+                                        <p:cTn id="12" dur="1" fill="hold">
+                                          <p:stCondLst>
+                                            <p:cond delay="0"/>
+                                          </p:stCondLst>
+                                        </p:cTn>
+                                        <p:tgtEl>
+                                          <p:spTgt spid="20"/>
+                                        </p:tgtEl>
+                                        <p:attrNameLst>
+                                          <p:attrName>style.visibility</p:attrName>
+                                        </p:attrNameLst>
+                                      </p:cBhvr>
+                                      <p:to>
+                                        <p:strVal val="visible"/>
+                                      </p:to>
+                                    </p:set>
+                                    <p:animEffect transition="in" filter="fade">
+                                      <p:cBhvr>
+                                        <p:cTn id="13" dur="500"/>
+                                        <p:tgtEl>
+                                          <p:spTgt spid="20"/>
+                                        </p:tgtEl>
+                                      </p:cBhvr>
+                                    </p:animEffect>
+                                  </p:childTnLst>
+                                </p:cTn>
+                              </p:par>
+                            </p:childTnLst>
+                          </p:cTn>
+                        </p:par>
+                      </p:childTnLst>
+                    </p:cTn>
+                  </p:par>
+                </p:childTnLst>
+              </p:cTn>
+              <p:prevCondLst>
+                <p:cond evt="onPrev" delay="0">
+                  <p:tgtEl>
+                    <p:sldTgt/>
+                  </p:tgtEl>
+                </p:cond>
+              </p:prevCondLst>
+              <p:nextCondLst>
+                <p:cond evt="onNext" delay="0">
+                  <p:tgtEl>
+                    <p:sldTgt/>
+                  </p:tgtEl>
+                </p:cond>
+              </p:nextCondLst>
+            </p:seq>
+          </p:childTnLst>
+        </p:cTn>
+      </p:par>
+    </p:tnLst>
+  </p:timing>
 </p:sld>
 </file>
 
@@ -23639,6 +25725,349 @@
   <p:clrMapOvr>
     <a:masterClrMapping/>
   </p:clrMapOvr>
+  <mc:AlternateContent xmlns:mc="http://schemas.openxmlformats.org/markup-compatibility/2006">
+    <mc:Choice xmlns:p14="http://schemas.microsoft.com/office/powerpoint/2010/main" Requires="p14">
+      <p:transition spd="med" p14:dur="700">
+        <p:fade/>
+      </p:transition>
+    </mc:Choice>
+    <mc:Fallback>
+      <p:transition spd="med">
+        <p:fade/>
+      </p:transition>
+    </mc:Fallback>
+  </mc:AlternateContent>
+  <p:timing>
+    <p:tnLst>
+      <p:par>
+        <p:cTn id="1" dur="indefinite" restart="never" nodeType="tmRoot">
+          <p:childTnLst>
+            <p:seq concurrent="1" nextAc="seek">
+              <p:cTn id="2" dur="indefinite" nodeType="mainSeq">
+                <p:childTnLst>
+                  <p:par>
+                    <p:cTn id="3" fill="hold">
+                      <p:stCondLst>
+                        <p:cond delay="indefinite"/>
+                        <p:cond evt="onBegin" delay="0">
+                          <p:tn val="2"/>
+                        </p:cond>
+                      </p:stCondLst>
+                      <p:childTnLst>
+                        <p:par>
+                          <p:cTn id="4" fill="hold">
+                            <p:stCondLst>
+                              <p:cond delay="0"/>
+                            </p:stCondLst>
+                            <p:childTnLst>
+                              <p:par>
+                                <p:cTn id="5" presetID="10" presetClass="entr" presetSubtype="0" fill="hold" nodeType="afterEffect">
+                                  <p:stCondLst>
+                                    <p:cond delay="0"/>
+                                  </p:stCondLst>
+                                  <p:childTnLst>
+                                    <p:set>
+                                      <p:cBhvr>
+                                        <p:cTn id="6" dur="1" fill="hold">
+                                          <p:stCondLst>
+                                            <p:cond delay="0"/>
+                                          </p:stCondLst>
+                                        </p:cTn>
+                                        <p:tgtEl>
+                                          <p:spTgt spid="4"/>
+                                        </p:tgtEl>
+                                        <p:attrNameLst>
+                                          <p:attrName>style.visibility</p:attrName>
+                                        </p:attrNameLst>
+                                      </p:cBhvr>
+                                      <p:to>
+                                        <p:strVal val="visible"/>
+                                      </p:to>
+                                    </p:set>
+                                    <p:animEffect transition="in" filter="fade">
+                                      <p:cBhvr>
+                                        <p:cTn id="7" dur="500"/>
+                                        <p:tgtEl>
+                                          <p:spTgt spid="4"/>
+                                        </p:tgtEl>
+                                      </p:cBhvr>
+                                    </p:animEffect>
+                                  </p:childTnLst>
+                                </p:cTn>
+                              </p:par>
+                              <p:par>
+                                <p:cTn id="8" presetID="10" presetClass="entr" presetSubtype="0" fill="hold" nodeType="withEffect">
+                                  <p:stCondLst>
+                                    <p:cond delay="225"/>
+                                  </p:stCondLst>
+                                  <p:childTnLst>
+                                    <p:set>
+                                      <p:cBhvr>
+                                        <p:cTn id="9" dur="1" fill="hold">
+                                          <p:stCondLst>
+                                            <p:cond delay="0"/>
+                                          </p:stCondLst>
+                                        </p:cTn>
+                                        <p:tgtEl>
+                                          <p:spTgt spid="5"/>
+                                        </p:tgtEl>
+                                        <p:attrNameLst>
+                                          <p:attrName>style.visibility</p:attrName>
+                                        </p:attrNameLst>
+                                      </p:cBhvr>
+                                      <p:to>
+                                        <p:strVal val="visible"/>
+                                      </p:to>
+                                    </p:set>
+                                    <p:animEffect transition="in" filter="fade">
+                                      <p:cBhvr>
+                                        <p:cTn id="10" dur="500"/>
+                                        <p:tgtEl>
+                                          <p:spTgt spid="5"/>
+                                        </p:tgtEl>
+                                      </p:cBhvr>
+                                    </p:animEffect>
+                                  </p:childTnLst>
+                                </p:cTn>
+                              </p:par>
+                              <p:par>
+                                <p:cTn id="11" presetID="10" presetClass="entr" presetSubtype="0" fill="hold" nodeType="withEffect">
+                                  <p:stCondLst>
+                                    <p:cond delay="450"/>
+                                  </p:stCondLst>
+                                  <p:childTnLst>
+                                    <p:set>
+                                      <p:cBhvr>
+                                        <p:cTn id="12" dur="1" fill="hold">
+                                          <p:stCondLst>
+                                            <p:cond delay="0"/>
+                                          </p:stCondLst>
+                                        </p:cTn>
+                                        <p:tgtEl>
+                                          <p:spTgt spid="7"/>
+                                        </p:tgtEl>
+                                        <p:attrNameLst>
+                                          <p:attrName>style.visibility</p:attrName>
+                                        </p:attrNameLst>
+                                      </p:cBhvr>
+                                      <p:to>
+                                        <p:strVal val="visible"/>
+                                      </p:to>
+                                    </p:set>
+                                    <p:animEffect transition="in" filter="fade">
+                                      <p:cBhvr>
+                                        <p:cTn id="13" dur="500"/>
+                                        <p:tgtEl>
+                                          <p:spTgt spid="7"/>
+                                        </p:tgtEl>
+                                      </p:cBhvr>
+                                    </p:animEffect>
+                                  </p:childTnLst>
+                                </p:cTn>
+                              </p:par>
+                              <p:par>
+                                <p:cTn id="14" presetID="10" presetClass="entr" presetSubtype="0" fill="hold" nodeType="withEffect">
+                                  <p:stCondLst>
+                                    <p:cond delay="675"/>
+                                  </p:stCondLst>
+                                  <p:childTnLst>
+                                    <p:set>
+                                      <p:cBhvr>
+                                        <p:cTn id="15" dur="1" fill="hold">
+                                          <p:stCondLst>
+                                            <p:cond delay="0"/>
+                                          </p:stCondLst>
+                                        </p:cTn>
+                                        <p:tgtEl>
+                                          <p:spTgt spid="8"/>
+                                        </p:tgtEl>
+                                        <p:attrNameLst>
+                                          <p:attrName>style.visibility</p:attrName>
+                                        </p:attrNameLst>
+                                      </p:cBhvr>
+                                      <p:to>
+                                        <p:strVal val="visible"/>
+                                      </p:to>
+                                    </p:set>
+                                    <p:animEffect transition="in" filter="fade">
+                                      <p:cBhvr>
+                                        <p:cTn id="16" dur="500"/>
+                                        <p:tgtEl>
+                                          <p:spTgt spid="8"/>
+                                        </p:tgtEl>
+                                      </p:cBhvr>
+                                    </p:animEffect>
+                                  </p:childTnLst>
+                                </p:cTn>
+                              </p:par>
+                              <p:par>
+                                <p:cTn id="17" presetID="10" presetClass="entr" presetSubtype="0" fill="hold" nodeType="withEffect">
+                                  <p:stCondLst>
+                                    <p:cond delay="900"/>
+                                  </p:stCondLst>
+                                  <p:childTnLst>
+                                    <p:set>
+                                      <p:cBhvr>
+                                        <p:cTn id="18" dur="1" fill="hold">
+                                          <p:stCondLst>
+                                            <p:cond delay="0"/>
+                                          </p:stCondLst>
+                                        </p:cTn>
+                                        <p:tgtEl>
+                                          <p:spTgt spid="10"/>
+                                        </p:tgtEl>
+                                        <p:attrNameLst>
+                                          <p:attrName>style.visibility</p:attrName>
+                                        </p:attrNameLst>
+                                      </p:cBhvr>
+                                      <p:to>
+                                        <p:strVal val="visible"/>
+                                      </p:to>
+                                    </p:set>
+                                    <p:animEffect transition="in" filter="fade">
+                                      <p:cBhvr>
+                                        <p:cTn id="19" dur="500"/>
+                                        <p:tgtEl>
+                                          <p:spTgt spid="10"/>
+                                        </p:tgtEl>
+                                      </p:cBhvr>
+                                    </p:animEffect>
+                                  </p:childTnLst>
+                                </p:cTn>
+                              </p:par>
+                              <p:par>
+                                <p:cTn id="20" presetID="10" presetClass="entr" presetSubtype="0" fill="hold" nodeType="withEffect">
+                                  <p:stCondLst>
+                                    <p:cond delay="1125"/>
+                                  </p:stCondLst>
+                                  <p:childTnLst>
+                                    <p:set>
+                                      <p:cBhvr>
+                                        <p:cTn id="21" dur="1" fill="hold">
+                                          <p:stCondLst>
+                                            <p:cond delay="0"/>
+                                          </p:stCondLst>
+                                        </p:cTn>
+                                        <p:tgtEl>
+                                          <p:spTgt spid="57"/>
+                                        </p:tgtEl>
+                                        <p:attrNameLst>
+                                          <p:attrName>style.visibility</p:attrName>
+                                        </p:attrNameLst>
+                                      </p:cBhvr>
+                                      <p:to>
+                                        <p:strVal val="visible"/>
+                                      </p:to>
+                                    </p:set>
+                                    <p:animEffect transition="in" filter="fade">
+                                      <p:cBhvr>
+                                        <p:cTn id="22" dur="500"/>
+                                        <p:tgtEl>
+                                          <p:spTgt spid="57"/>
+                                        </p:tgtEl>
+                                      </p:cBhvr>
+                                    </p:animEffect>
+                                  </p:childTnLst>
+                                </p:cTn>
+                              </p:par>
+                              <p:par>
+                                <p:cTn id="23" presetID="10" presetClass="entr" presetSubtype="0" fill="hold" nodeType="withEffect">
+                                  <p:stCondLst>
+                                    <p:cond delay="1350"/>
+                                  </p:stCondLst>
+                                  <p:childTnLst>
+                                    <p:set>
+                                      <p:cBhvr>
+                                        <p:cTn id="24" dur="1" fill="hold">
+                                          <p:stCondLst>
+                                            <p:cond delay="0"/>
+                                          </p:stCondLst>
+                                        </p:cTn>
+                                        <p:tgtEl>
+                                          <p:spTgt spid="59"/>
+                                        </p:tgtEl>
+                                        <p:attrNameLst>
+                                          <p:attrName>style.visibility</p:attrName>
+                                        </p:attrNameLst>
+                                      </p:cBhvr>
+                                      <p:to>
+                                        <p:strVal val="visible"/>
+                                      </p:to>
+                                    </p:set>
+                                    <p:animEffect transition="in" filter="fade">
+                                      <p:cBhvr>
+                                        <p:cTn id="25" dur="500"/>
+                                        <p:tgtEl>
+                                          <p:spTgt spid="59"/>
+                                        </p:tgtEl>
+                                      </p:cBhvr>
+                                    </p:animEffect>
+                                  </p:childTnLst>
+                                </p:cTn>
+                              </p:par>
+                              <p:par>
+                                <p:cTn id="26" presetID="10" presetClass="entr" presetSubtype="0" fill="hold" nodeType="withEffect">
+                                  <p:stCondLst>
+                                    <p:cond delay="1575"/>
+                                  </p:stCondLst>
+                                  <p:childTnLst>
+                                    <p:set>
+                                      <p:cBhvr>
+                                        <p:cTn id="27" dur="1" fill="hold">
+                                          <p:stCondLst>
+                                            <p:cond delay="0"/>
+                                          </p:stCondLst>
+                                        </p:cTn>
+                                        <p:tgtEl>
+                                          <p:spTgt spid="60"/>
+                                        </p:tgtEl>
+                                        <p:attrNameLst>
+                                          <p:attrName>style.visibility</p:attrName>
+                                        </p:attrNameLst>
+                                      </p:cBhvr>
+                                      <p:to>
+                                        <p:strVal val="visible"/>
+                                      </p:to>
+                                    </p:set>
+                                    <p:animEffect transition="in" filter="fade">
+                                      <p:cBhvr>
+                                        <p:cTn id="28" dur="500"/>
+                                        <p:tgtEl>
+                                          <p:spTgt spid="60"/>
+                                        </p:tgtEl>
+                                      </p:cBhvr>
+                                    </p:animEffect>
+                                  </p:childTnLst>
+                                </p:cTn>
+                              </p:par>
+                            </p:childTnLst>
+                          </p:cTn>
+                        </p:par>
+                      </p:childTnLst>
+                    </p:cTn>
+                  </p:par>
+                </p:childTnLst>
+              </p:cTn>
+              <p:prevCondLst>
+                <p:cond evt="onPrev" delay="0">
+                  <p:tgtEl>
+                    <p:sldTgt/>
+                  </p:tgtEl>
+                </p:cond>
+              </p:prevCondLst>
+              <p:nextCondLst>
+                <p:cond evt="onNext" delay="0">
+                  <p:tgtEl>
+                    <p:sldTgt/>
+                  </p:tgtEl>
+                </p:cond>
+              </p:nextCondLst>
+            </p:seq>
+          </p:childTnLst>
+        </p:cTn>
+      </p:par>
+    </p:tnLst>
+  </p:timing>
 </p:sld>
 </file>
 
@@ -24579,6 +27008,209 @@
   <p:clrMapOvr>
     <a:masterClrMapping/>
   </p:clrMapOvr>
+  <mc:AlternateContent xmlns:mc="http://schemas.openxmlformats.org/markup-compatibility/2006">
+    <mc:Choice xmlns:p14="http://schemas.microsoft.com/office/powerpoint/2010/main" Requires="p14">
+      <p:transition spd="med" p14:dur="700">
+        <p:fade/>
+      </p:transition>
+    </mc:Choice>
+    <mc:Fallback>
+      <p:transition spd="med">
+        <p:fade/>
+      </p:transition>
+    </mc:Fallback>
+  </mc:AlternateContent>
+  <p:timing>
+    <p:tnLst>
+      <p:par>
+        <p:cTn id="1" dur="indefinite" restart="never" nodeType="tmRoot">
+          <p:childTnLst>
+            <p:seq concurrent="1" nextAc="seek">
+              <p:cTn id="2" dur="indefinite" nodeType="mainSeq">
+                <p:childTnLst>
+                  <p:par>
+                    <p:cTn id="3" fill="hold">
+                      <p:stCondLst>
+                        <p:cond delay="indefinite"/>
+                        <p:cond evt="onBegin" delay="0">
+                          <p:tn val="2"/>
+                        </p:cond>
+                      </p:stCondLst>
+                      <p:childTnLst>
+                        <p:par>
+                          <p:cTn id="4" fill="hold">
+                            <p:stCondLst>
+                              <p:cond delay="0"/>
+                            </p:stCondLst>
+                            <p:childTnLst>
+                              <p:par>
+                                <p:cTn id="5" presetID="10" presetClass="entr" presetSubtype="0" fill="hold" nodeType="afterEffect">
+                                  <p:stCondLst>
+                                    <p:cond delay="0"/>
+                                  </p:stCondLst>
+                                  <p:childTnLst>
+                                    <p:set>
+                                      <p:cBhvr>
+                                        <p:cTn id="6" dur="1" fill="hold">
+                                          <p:stCondLst>
+                                            <p:cond delay="0"/>
+                                          </p:stCondLst>
+                                        </p:cTn>
+                                        <p:tgtEl>
+                                          <p:spTgt spid="4"/>
+                                        </p:tgtEl>
+                                        <p:attrNameLst>
+                                          <p:attrName>style.visibility</p:attrName>
+                                        </p:attrNameLst>
+                                      </p:cBhvr>
+                                      <p:to>
+                                        <p:strVal val="visible"/>
+                                      </p:to>
+                                    </p:set>
+                                    <p:animEffect transition="in" filter="fade">
+                                      <p:cBhvr>
+                                        <p:cTn id="7" dur="500"/>
+                                        <p:tgtEl>
+                                          <p:spTgt spid="4"/>
+                                        </p:tgtEl>
+                                      </p:cBhvr>
+                                    </p:animEffect>
+                                  </p:childTnLst>
+                                </p:cTn>
+                              </p:par>
+                              <p:par>
+                                <p:cTn id="8" presetID="10" presetClass="entr" presetSubtype="0" fill="hold" nodeType="withEffect">
+                                  <p:stCondLst>
+                                    <p:cond delay="300"/>
+                                  </p:stCondLst>
+                                  <p:childTnLst>
+                                    <p:set>
+                                      <p:cBhvr>
+                                        <p:cTn id="9" dur="1" fill="hold">
+                                          <p:stCondLst>
+                                            <p:cond delay="0"/>
+                                          </p:stCondLst>
+                                        </p:cTn>
+                                        <p:tgtEl>
+                                          <p:spTgt spid="24"/>
+                                        </p:tgtEl>
+                                        <p:attrNameLst>
+                                          <p:attrName>style.visibility</p:attrName>
+                                        </p:attrNameLst>
+                                      </p:cBhvr>
+                                      <p:to>
+                                        <p:strVal val="visible"/>
+                                      </p:to>
+                                    </p:set>
+                                    <p:animEffect transition="in" filter="fade">
+                                      <p:cBhvr>
+                                        <p:cTn id="10" dur="500"/>
+                                        <p:tgtEl>
+                                          <p:spTgt spid="24"/>
+                                        </p:tgtEl>
+                                      </p:cBhvr>
+                                    </p:animEffect>
+                                  </p:childTnLst>
+                                </p:cTn>
+                              </p:par>
+                              <p:par>
+                                <p:cTn id="11" presetID="10" presetClass="entr" presetSubtype="0" fill="hold" nodeType="withEffect">
+                                  <p:stCondLst>
+                                    <p:cond delay="600"/>
+                                  </p:stCondLst>
+                                  <p:childTnLst>
+                                    <p:set>
+                                      <p:cBhvr>
+                                        <p:cTn id="12" dur="1" fill="hold">
+                                          <p:stCondLst>
+                                            <p:cond delay="0"/>
+                                          </p:stCondLst>
+                                        </p:cTn>
+                                        <p:tgtEl>
+                                          <p:spTgt spid="25"/>
+                                        </p:tgtEl>
+                                        <p:attrNameLst>
+                                          <p:attrName>style.visibility</p:attrName>
+                                        </p:attrNameLst>
+                                      </p:cBhvr>
+                                      <p:to>
+                                        <p:strVal val="visible"/>
+                                      </p:to>
+                                    </p:set>
+                                    <p:animEffect transition="in" filter="fade">
+                                      <p:cBhvr>
+                                        <p:cTn id="13" dur="500"/>
+                                        <p:tgtEl>
+                                          <p:spTgt spid="25"/>
+                                        </p:tgtEl>
+                                      </p:cBhvr>
+                                    </p:animEffect>
+                                  </p:childTnLst>
+                                </p:cTn>
+                              </p:par>
+                              <p:par>
+                                <p:cTn id="14" presetID="10" presetClass="entr" presetSubtype="0" fill="hold" nodeType="withEffect">
+                                  <p:stCondLst>
+                                    <p:cond delay="900"/>
+                                  </p:stCondLst>
+                                  <p:childTnLst>
+                                    <p:set>
+                                      <p:cBhvr>
+                                        <p:cTn id="15" dur="1" fill="hold">
+                                          <p:stCondLst>
+                                            <p:cond delay="0"/>
+                                          </p:stCondLst>
+                                        </p:cTn>
+                                        <p:tgtEl>
+                                          <p:spTgt spid="26"/>
+                                        </p:tgtEl>
+                                        <p:attrNameLst>
+                                          <p:attrName>style.visibility</p:attrName>
+                                        </p:attrNameLst>
+                                      </p:cBhvr>
+                                      <p:to>
+                                        <p:strVal val="visible"/>
+                                      </p:to>
+                                    </p:set>
+                                    <p:animEffect transition="in" filter="fade">
+                                      <p:cBhvr>
+                                        <p:cTn id="16" dur="500"/>
+                                        <p:tgtEl>
+                                          <p:spTgt spid="26"/>
+                                        </p:tgtEl>
+                                      </p:cBhvr>
+                                    </p:animEffect>
+                                  </p:childTnLst>
+                                </p:cTn>
+                              </p:par>
+                            </p:childTnLst>
+                          </p:cTn>
+                        </p:par>
+                      </p:childTnLst>
+                    </p:cTn>
+                  </p:par>
+                </p:childTnLst>
+              </p:cTn>
+              <p:prevCondLst>
+                <p:cond evt="onPrev" delay="0">
+                  <p:tgtEl>
+                    <p:sldTgt/>
+                  </p:tgtEl>
+                </p:cond>
+              </p:prevCondLst>
+              <p:nextCondLst>
+                <p:cond evt="onNext" delay="0">
+                  <p:tgtEl>
+                    <p:sldTgt/>
+                  </p:tgtEl>
+                </p:cond>
+              </p:nextCondLst>
+            </p:seq>
+          </p:childTnLst>
+        </p:cTn>
+      </p:par>
+    </p:tnLst>
+  </p:timing>
 </p:sld>
 </file>
 
@@ -25190,6 +27822,244 @@
   <p:clrMapOvr>
     <a:masterClrMapping/>
   </p:clrMapOvr>
+  <mc:AlternateContent xmlns:mc="http://schemas.openxmlformats.org/markup-compatibility/2006">
+    <mc:Choice xmlns:p14="http://schemas.microsoft.com/office/powerpoint/2010/main" Requires="p14">
+      <p:transition spd="med" p14:dur="700">
+        <p:fade/>
+      </p:transition>
+    </mc:Choice>
+    <mc:Fallback>
+      <p:transition spd="med">
+        <p:fade/>
+      </p:transition>
+    </mc:Fallback>
+  </mc:AlternateContent>
+  <p:timing>
+    <p:tnLst>
+      <p:par>
+        <p:cTn id="1" dur="indefinite" restart="never" nodeType="tmRoot">
+          <p:childTnLst>
+            <p:seq concurrent="1" nextAc="seek">
+              <p:cTn id="2" dur="indefinite" nodeType="mainSeq">
+                <p:childTnLst>
+                  <p:par>
+                    <p:cTn id="3" fill="hold">
+                      <p:stCondLst>
+                        <p:cond delay="indefinite"/>
+                        <p:cond evt="onBegin" delay="0">
+                          <p:tn val="2"/>
+                        </p:cond>
+                      </p:stCondLst>
+                      <p:childTnLst>
+                        <p:par>
+                          <p:cTn id="4" fill="hold">
+                            <p:stCondLst>
+                              <p:cond delay="0"/>
+                            </p:stCondLst>
+                            <p:childTnLst>
+                              <p:par>
+                                <p:cTn id="5" presetID="10" presetClass="entr" presetSubtype="0" fill="hold" nodeType="afterEffect">
+                                  <p:stCondLst>
+                                    <p:cond delay="0"/>
+                                  </p:stCondLst>
+                                  <p:childTnLst>
+                                    <p:set>
+                                      <p:cBhvr>
+                                        <p:cTn id="6" dur="1" fill="hold">
+                                          <p:stCondLst>
+                                            <p:cond delay="0"/>
+                                          </p:stCondLst>
+                                        </p:cTn>
+                                        <p:tgtEl>
+                                          <p:spTgt spid="4"/>
+                                        </p:tgtEl>
+                                        <p:attrNameLst>
+                                          <p:attrName>style.visibility</p:attrName>
+                                        </p:attrNameLst>
+                                      </p:cBhvr>
+                                      <p:to>
+                                        <p:strVal val="visible"/>
+                                      </p:to>
+                                    </p:set>
+                                    <p:animEffect transition="in" filter="fade">
+                                      <p:cBhvr>
+                                        <p:cTn id="7" dur="500"/>
+                                        <p:tgtEl>
+                                          <p:spTgt spid="4"/>
+                                        </p:tgtEl>
+                                      </p:cBhvr>
+                                    </p:animEffect>
+                                  </p:childTnLst>
+                                </p:cTn>
+                              </p:par>
+                              <p:par>
+                                <p:cTn id="8" presetID="10" presetClass="entr" presetSubtype="0" fill="hold" nodeType="withEffect">
+                                  <p:stCondLst>
+                                    <p:cond delay="300"/>
+                                  </p:stCondLst>
+                                  <p:childTnLst>
+                                    <p:set>
+                                      <p:cBhvr>
+                                        <p:cTn id="9" dur="1" fill="hold">
+                                          <p:stCondLst>
+                                            <p:cond delay="0"/>
+                                          </p:stCondLst>
+                                        </p:cTn>
+                                        <p:tgtEl>
+                                          <p:spTgt spid="15"/>
+                                        </p:tgtEl>
+                                        <p:attrNameLst>
+                                          <p:attrName>style.visibility</p:attrName>
+                                        </p:attrNameLst>
+                                      </p:cBhvr>
+                                      <p:to>
+                                        <p:strVal val="visible"/>
+                                      </p:to>
+                                    </p:set>
+                                    <p:animEffect transition="in" filter="fade">
+                                      <p:cBhvr>
+                                        <p:cTn id="10" dur="500"/>
+                                        <p:tgtEl>
+                                          <p:spTgt spid="15"/>
+                                        </p:tgtEl>
+                                      </p:cBhvr>
+                                    </p:animEffect>
+                                  </p:childTnLst>
+                                </p:cTn>
+                              </p:par>
+                              <p:par>
+                                <p:cTn id="11" presetID="10" presetClass="entr" presetSubtype="0" fill="hold" nodeType="withEffect">
+                                  <p:stCondLst>
+                                    <p:cond delay="600"/>
+                                  </p:stCondLst>
+                                  <p:childTnLst>
+                                    <p:set>
+                                      <p:cBhvr>
+                                        <p:cTn id="12" dur="1" fill="hold">
+                                          <p:stCondLst>
+                                            <p:cond delay="0"/>
+                                          </p:stCondLst>
+                                        </p:cTn>
+                                        <p:tgtEl>
+                                          <p:spTgt spid="16"/>
+                                        </p:tgtEl>
+                                        <p:attrNameLst>
+                                          <p:attrName>style.visibility</p:attrName>
+                                        </p:attrNameLst>
+                                      </p:cBhvr>
+                                      <p:to>
+                                        <p:strVal val="visible"/>
+                                      </p:to>
+                                    </p:set>
+                                    <p:animEffect transition="in" filter="fade">
+                                      <p:cBhvr>
+                                        <p:cTn id="13" dur="500"/>
+                                        <p:tgtEl>
+                                          <p:spTgt spid="16"/>
+                                        </p:tgtEl>
+                                      </p:cBhvr>
+                                    </p:animEffect>
+                                  </p:childTnLst>
+                                </p:cTn>
+                              </p:par>
+                              <p:par>
+                                <p:cTn id="14" presetID="10" presetClass="entr" presetSubtype="0" fill="hold" nodeType="withEffect">
+                                  <p:stCondLst>
+                                    <p:cond delay="900"/>
+                                  </p:stCondLst>
+                                  <p:childTnLst>
+                                    <p:set>
+                                      <p:cBhvr>
+                                        <p:cTn id="15" dur="1" fill="hold">
+                                          <p:stCondLst>
+                                            <p:cond delay="0"/>
+                                          </p:stCondLst>
+                                        </p:cTn>
+                                        <p:tgtEl>
+                                          <p:spTgt spid="17"/>
+                                        </p:tgtEl>
+                                        <p:attrNameLst>
+                                          <p:attrName>style.visibility</p:attrName>
+                                        </p:attrNameLst>
+                                      </p:cBhvr>
+                                      <p:to>
+                                        <p:strVal val="visible"/>
+                                      </p:to>
+                                    </p:set>
+                                    <p:animEffect transition="in" filter="fade">
+                                      <p:cBhvr>
+                                        <p:cTn id="16" dur="500"/>
+                                        <p:tgtEl>
+                                          <p:spTgt spid="17"/>
+                                        </p:tgtEl>
+                                      </p:cBhvr>
+                                    </p:animEffect>
+                                  </p:childTnLst>
+                                </p:cTn>
+                              </p:par>
+                              <p:par>
+                                <p:cTn id="17" presetID="10" presetClass="entr" presetSubtype="0" fill="hold" nodeType="withEffect">
+                                  <p:stCondLst>
+                                    <p:cond delay="1200"/>
+                                  </p:stCondLst>
+                                  <p:childTnLst>
+                                    <p:set>
+                                      <p:cBhvr>
+                                        <p:cTn id="18" dur="1" fill="hold">
+                                          <p:stCondLst>
+                                            <p:cond delay="0"/>
+                                          </p:stCondLst>
+                                        </p:cTn>
+                                        <p:tgtEl>
+                                          <p:spTgt spid="18"/>
+                                        </p:tgtEl>
+                                        <p:attrNameLst>
+                                          <p:attrName>style.visibility</p:attrName>
+                                        </p:attrNameLst>
+                                      </p:cBhvr>
+                                      <p:to>
+                                        <p:strVal val="visible"/>
+                                      </p:to>
+                                    </p:set>
+                                    <p:animEffect transition="in" filter="fade">
+                                      <p:cBhvr>
+                                        <p:cTn id="19" dur="500"/>
+                                        <p:tgtEl>
+                                          <p:spTgt spid="18"/>
+                                        </p:tgtEl>
+                                      </p:cBhvr>
+                                    </p:animEffect>
+                                  </p:childTnLst>
+                                </p:cTn>
+                              </p:par>
+                            </p:childTnLst>
+                          </p:cTn>
+                        </p:par>
+                      </p:childTnLst>
+                    </p:cTn>
+                  </p:par>
+                </p:childTnLst>
+              </p:cTn>
+              <p:prevCondLst>
+                <p:cond evt="onPrev" delay="0">
+                  <p:tgtEl>
+                    <p:sldTgt/>
+                  </p:tgtEl>
+                </p:cond>
+              </p:prevCondLst>
+              <p:nextCondLst>
+                <p:cond evt="onNext" delay="0">
+                  <p:tgtEl>
+                    <p:sldTgt/>
+                  </p:tgtEl>
+                </p:cond>
+              </p:nextCondLst>
+            </p:seq>
+          </p:childTnLst>
+        </p:cTn>
+      </p:par>
+    </p:tnLst>
+  </p:timing>
 </p:sld>
 </file>
 
@@ -26032,6 +28902,174 @@
   <p:clrMapOvr>
     <a:masterClrMapping/>
   </p:clrMapOvr>
+  <mc:AlternateContent xmlns:mc="http://schemas.openxmlformats.org/markup-compatibility/2006">
+    <mc:Choice xmlns:p14="http://schemas.microsoft.com/office/powerpoint/2010/main" Requires="p14">
+      <p:transition spd="med" p14:dur="700">
+        <p:fade/>
+      </p:transition>
+    </mc:Choice>
+    <mc:Fallback>
+      <p:transition spd="med">
+        <p:fade/>
+      </p:transition>
+    </mc:Fallback>
+  </mc:AlternateContent>
+  <p:timing>
+    <p:tnLst>
+      <p:par>
+        <p:cTn id="1" dur="indefinite" restart="never" nodeType="tmRoot">
+          <p:childTnLst>
+            <p:seq concurrent="1" nextAc="seek">
+              <p:cTn id="2" dur="indefinite" nodeType="mainSeq">
+                <p:childTnLst>
+                  <p:par>
+                    <p:cTn id="3" fill="hold">
+                      <p:stCondLst>
+                        <p:cond delay="indefinite"/>
+                        <p:cond evt="onBegin" delay="0">
+                          <p:tn val="2"/>
+                        </p:cond>
+                      </p:stCondLst>
+                      <p:childTnLst>
+                        <p:par>
+                          <p:cTn id="4" fill="hold">
+                            <p:stCondLst>
+                              <p:cond delay="0"/>
+                            </p:stCondLst>
+                            <p:childTnLst>
+                              <p:par>
+                                <p:cTn id="5" presetID="10" presetClass="entr" presetSubtype="0" fill="hold" nodeType="afterEffect">
+                                  <p:stCondLst>
+                                    <p:cond delay="0"/>
+                                  </p:stCondLst>
+                                  <p:childTnLst>
+                                    <p:set>
+                                      <p:cBhvr>
+                                        <p:cTn id="6" dur="1" fill="hold">
+                                          <p:stCondLst>
+                                            <p:cond delay="0"/>
+                                          </p:stCondLst>
+                                        </p:cTn>
+                                        <p:tgtEl>
+                                          <p:spTgt spid="4"/>
+                                        </p:tgtEl>
+                                        <p:attrNameLst>
+                                          <p:attrName>style.visibility</p:attrName>
+                                        </p:attrNameLst>
+                                      </p:cBhvr>
+                                      <p:to>
+                                        <p:strVal val="visible"/>
+                                      </p:to>
+                                    </p:set>
+                                    <p:animEffect transition="in" filter="fade">
+                                      <p:cBhvr>
+                                        <p:cTn id="7" dur="500"/>
+                                        <p:tgtEl>
+                                          <p:spTgt spid="4"/>
+                                        </p:tgtEl>
+                                      </p:cBhvr>
+                                    </p:animEffect>
+                                  </p:childTnLst>
+                                </p:cTn>
+                              </p:par>
+                              <p:par>
+                                <p:cTn id="8" presetID="10" presetClass="entr" presetSubtype="0" fill="hold" nodeType="withEffect">
+                                  <p:stCondLst>
+                                    <p:cond delay="300"/>
+                                  </p:stCondLst>
+                                  <p:childTnLst>
+                                    <p:set>
+                                      <p:cBhvr>
+                                        <p:cTn id="9" dur="1" fill="hold">
+                                          <p:stCondLst>
+                                            <p:cond delay="0"/>
+                                          </p:stCondLst>
+                                        </p:cTn>
+                                        <p:tgtEl>
+                                          <p:spTgt spid="24"/>
+                                        </p:tgtEl>
+                                        <p:attrNameLst>
+                                          <p:attrName>style.visibility</p:attrName>
+                                        </p:attrNameLst>
+                                      </p:cBhvr>
+                                      <p:to>
+                                        <p:strVal val="visible"/>
+                                      </p:to>
+                                    </p:set>
+                                    <p:animEffect transition="in" filter="fade">
+                                      <p:cBhvr>
+                                        <p:cTn id="10" dur="500"/>
+                                        <p:tgtEl>
+                                          <p:spTgt spid="24"/>
+                                        </p:tgtEl>
+                                      </p:cBhvr>
+                                    </p:animEffect>
+                                  </p:childTnLst>
+                                </p:cTn>
+                              </p:par>
+                              <p:par>
+                                <p:cTn id="11" presetID="10" presetClass="entr" presetSubtype="0" fill="hold" nodeType="withEffect">
+                                  <p:stCondLst>
+                                    <p:cond delay="600"/>
+                                  </p:stCondLst>
+                                  <p:childTnLst>
+                                    <p:set>
+                                      <p:cBhvr>
+                                        <p:cTn id="12" dur="1" fill="hold">
+                                          <p:stCondLst>
+                                            <p:cond delay="0"/>
+                                          </p:stCondLst>
+                                        </p:cTn>
+                                        <p:tgtEl>
+                                          <p:spTgt spid="25"/>
+                                        </p:tgtEl>
+                                        <p:attrNameLst>
+                                          <p:attrName>style.visibility</p:attrName>
+                                        </p:attrNameLst>
+                                      </p:cBhvr>
+                                      <p:to>
+                                        <p:strVal val="visible"/>
+                                      </p:to>
+                                    </p:set>
+                                    <p:animEffect transition="in" filter="fade">
+                                      <p:cBhvr>
+                                        <p:cTn id="13" dur="500"/>
+                                        <p:tgtEl>
+                                          <p:spTgt spid="25"/>
+                                        </p:tgtEl>
+                                      </p:cBhvr>
+                                    </p:animEffect>
+                                  </p:childTnLst>
+                                </p:cTn>
+                              </p:par>
+                            </p:childTnLst>
+                          </p:cTn>
+                        </p:par>
+                      </p:childTnLst>
+                    </p:cTn>
+                  </p:par>
+                </p:childTnLst>
+              </p:cTn>
+              <p:prevCondLst>
+                <p:cond evt="onPrev" delay="0">
+                  <p:tgtEl>
+                    <p:sldTgt/>
+                  </p:tgtEl>
+                </p:cond>
+              </p:prevCondLst>
+              <p:nextCondLst>
+                <p:cond evt="onNext" delay="0">
+                  <p:tgtEl>
+                    <p:sldTgt/>
+                  </p:tgtEl>
+                </p:cond>
+              </p:nextCondLst>
+            </p:seq>
+          </p:childTnLst>
+        </p:cTn>
+      </p:par>
+    </p:tnLst>
+  </p:timing>
 </p:sld>
 </file>
 
@@ -26978,6 +30016,244 @@
   <p:clrMapOvr>
     <a:masterClrMapping/>
   </p:clrMapOvr>
+  <mc:AlternateContent xmlns:mc="http://schemas.openxmlformats.org/markup-compatibility/2006">
+    <mc:Choice xmlns:p14="http://schemas.microsoft.com/office/powerpoint/2010/main" Requires="p14">
+      <p:transition spd="med" p14:dur="700">
+        <p:fade/>
+      </p:transition>
+    </mc:Choice>
+    <mc:Fallback>
+      <p:transition spd="med">
+        <p:fade/>
+      </p:transition>
+    </mc:Fallback>
+  </mc:AlternateContent>
+  <p:timing>
+    <p:tnLst>
+      <p:par>
+        <p:cTn id="1" dur="indefinite" restart="never" nodeType="tmRoot">
+          <p:childTnLst>
+            <p:seq concurrent="1" nextAc="seek">
+              <p:cTn id="2" dur="indefinite" nodeType="mainSeq">
+                <p:childTnLst>
+                  <p:par>
+                    <p:cTn id="3" fill="hold">
+                      <p:stCondLst>
+                        <p:cond delay="indefinite"/>
+                        <p:cond evt="onBegin" delay="0">
+                          <p:tn val="2"/>
+                        </p:cond>
+                      </p:stCondLst>
+                      <p:childTnLst>
+                        <p:par>
+                          <p:cTn id="4" fill="hold">
+                            <p:stCondLst>
+                              <p:cond delay="0"/>
+                            </p:stCondLst>
+                            <p:childTnLst>
+                              <p:par>
+                                <p:cTn id="5" presetID="10" presetClass="entr" presetSubtype="0" fill="hold" nodeType="afterEffect">
+                                  <p:stCondLst>
+                                    <p:cond delay="0"/>
+                                  </p:stCondLst>
+                                  <p:childTnLst>
+                                    <p:set>
+                                      <p:cBhvr>
+                                        <p:cTn id="6" dur="1" fill="hold">
+                                          <p:stCondLst>
+                                            <p:cond delay="0"/>
+                                          </p:stCondLst>
+                                        </p:cTn>
+                                        <p:tgtEl>
+                                          <p:spTgt spid="4"/>
+                                        </p:tgtEl>
+                                        <p:attrNameLst>
+                                          <p:attrName>style.visibility</p:attrName>
+                                        </p:attrNameLst>
+                                      </p:cBhvr>
+                                      <p:to>
+                                        <p:strVal val="visible"/>
+                                      </p:to>
+                                    </p:set>
+                                    <p:animEffect transition="in" filter="fade">
+                                      <p:cBhvr>
+                                        <p:cTn id="7" dur="500"/>
+                                        <p:tgtEl>
+                                          <p:spTgt spid="4"/>
+                                        </p:tgtEl>
+                                      </p:cBhvr>
+                                    </p:animEffect>
+                                  </p:childTnLst>
+                                </p:cTn>
+                              </p:par>
+                              <p:par>
+                                <p:cTn id="8" presetID="10" presetClass="entr" presetSubtype="0" fill="hold" nodeType="withEffect">
+                                  <p:stCondLst>
+                                    <p:cond delay="300"/>
+                                  </p:stCondLst>
+                                  <p:childTnLst>
+                                    <p:set>
+                                      <p:cBhvr>
+                                        <p:cTn id="9" dur="1" fill="hold">
+                                          <p:stCondLst>
+                                            <p:cond delay="0"/>
+                                          </p:stCondLst>
+                                        </p:cTn>
+                                        <p:tgtEl>
+                                          <p:spTgt spid="26"/>
+                                        </p:tgtEl>
+                                        <p:attrNameLst>
+                                          <p:attrName>style.visibility</p:attrName>
+                                        </p:attrNameLst>
+                                      </p:cBhvr>
+                                      <p:to>
+                                        <p:strVal val="visible"/>
+                                      </p:to>
+                                    </p:set>
+                                    <p:animEffect transition="in" filter="fade">
+                                      <p:cBhvr>
+                                        <p:cTn id="10" dur="500"/>
+                                        <p:tgtEl>
+                                          <p:spTgt spid="26"/>
+                                        </p:tgtEl>
+                                      </p:cBhvr>
+                                    </p:animEffect>
+                                  </p:childTnLst>
+                                </p:cTn>
+                              </p:par>
+                              <p:par>
+                                <p:cTn id="11" presetID="10" presetClass="entr" presetSubtype="0" fill="hold" nodeType="withEffect">
+                                  <p:stCondLst>
+                                    <p:cond delay="600"/>
+                                  </p:stCondLst>
+                                  <p:childTnLst>
+                                    <p:set>
+                                      <p:cBhvr>
+                                        <p:cTn id="12" dur="1" fill="hold">
+                                          <p:stCondLst>
+                                            <p:cond delay="0"/>
+                                          </p:stCondLst>
+                                        </p:cTn>
+                                        <p:tgtEl>
+                                          <p:spTgt spid="27"/>
+                                        </p:tgtEl>
+                                        <p:attrNameLst>
+                                          <p:attrName>style.visibility</p:attrName>
+                                        </p:attrNameLst>
+                                      </p:cBhvr>
+                                      <p:to>
+                                        <p:strVal val="visible"/>
+                                      </p:to>
+                                    </p:set>
+                                    <p:animEffect transition="in" filter="fade">
+                                      <p:cBhvr>
+                                        <p:cTn id="13" dur="500"/>
+                                        <p:tgtEl>
+                                          <p:spTgt spid="27"/>
+                                        </p:tgtEl>
+                                      </p:cBhvr>
+                                    </p:animEffect>
+                                  </p:childTnLst>
+                                </p:cTn>
+                              </p:par>
+                              <p:par>
+                                <p:cTn id="14" presetID="10" presetClass="entr" presetSubtype="0" fill="hold" nodeType="withEffect">
+                                  <p:stCondLst>
+                                    <p:cond delay="900"/>
+                                  </p:stCondLst>
+                                  <p:childTnLst>
+                                    <p:set>
+                                      <p:cBhvr>
+                                        <p:cTn id="15" dur="1" fill="hold">
+                                          <p:stCondLst>
+                                            <p:cond delay="0"/>
+                                          </p:stCondLst>
+                                        </p:cTn>
+                                        <p:tgtEl>
+                                          <p:spTgt spid="29"/>
+                                        </p:tgtEl>
+                                        <p:attrNameLst>
+                                          <p:attrName>style.visibility</p:attrName>
+                                        </p:attrNameLst>
+                                      </p:cBhvr>
+                                      <p:to>
+                                        <p:strVal val="visible"/>
+                                      </p:to>
+                                    </p:set>
+                                    <p:animEffect transition="in" filter="fade">
+                                      <p:cBhvr>
+                                        <p:cTn id="16" dur="500"/>
+                                        <p:tgtEl>
+                                          <p:spTgt spid="29"/>
+                                        </p:tgtEl>
+                                      </p:cBhvr>
+                                    </p:animEffect>
+                                  </p:childTnLst>
+                                </p:cTn>
+                              </p:par>
+                              <p:par>
+                                <p:cTn id="17" presetID="10" presetClass="entr" presetSubtype="0" fill="hold" nodeType="withEffect">
+                                  <p:stCondLst>
+                                    <p:cond delay="1200"/>
+                                  </p:stCondLst>
+                                  <p:childTnLst>
+                                    <p:set>
+                                      <p:cBhvr>
+                                        <p:cTn id="18" dur="1" fill="hold">
+                                          <p:stCondLst>
+                                            <p:cond delay="0"/>
+                                          </p:stCondLst>
+                                        </p:cTn>
+                                        <p:tgtEl>
+                                          <p:spTgt spid="30"/>
+                                        </p:tgtEl>
+                                        <p:attrNameLst>
+                                          <p:attrName>style.visibility</p:attrName>
+                                        </p:attrNameLst>
+                                      </p:cBhvr>
+                                      <p:to>
+                                        <p:strVal val="visible"/>
+                                      </p:to>
+                                    </p:set>
+                                    <p:animEffect transition="in" filter="fade">
+                                      <p:cBhvr>
+                                        <p:cTn id="19" dur="500"/>
+                                        <p:tgtEl>
+                                          <p:spTgt spid="30"/>
+                                        </p:tgtEl>
+                                      </p:cBhvr>
+                                    </p:animEffect>
+                                  </p:childTnLst>
+                                </p:cTn>
+                              </p:par>
+                            </p:childTnLst>
+                          </p:cTn>
+                        </p:par>
+                      </p:childTnLst>
+                    </p:cTn>
+                  </p:par>
+                </p:childTnLst>
+              </p:cTn>
+              <p:prevCondLst>
+                <p:cond evt="onPrev" delay="0">
+                  <p:tgtEl>
+                    <p:sldTgt/>
+                  </p:tgtEl>
+                </p:cond>
+              </p:prevCondLst>
+              <p:nextCondLst>
+                <p:cond evt="onNext" delay="0">
+                  <p:tgtEl>
+                    <p:sldTgt/>
+                  </p:tgtEl>
+                </p:cond>
+              </p:nextCondLst>
+            </p:seq>
+          </p:childTnLst>
+        </p:cTn>
+      </p:par>
+    </p:tnLst>
+  </p:timing>
 </p:sld>
 </file>
 
@@ -27732,6 +31008,244 @@
   <p:clrMapOvr>
     <a:masterClrMapping/>
   </p:clrMapOvr>
+  <mc:AlternateContent xmlns:mc="http://schemas.openxmlformats.org/markup-compatibility/2006">
+    <mc:Choice xmlns:p14="http://schemas.microsoft.com/office/powerpoint/2010/main" Requires="p14">
+      <p:transition spd="med" p14:dur="700">
+        <p:fade/>
+      </p:transition>
+    </mc:Choice>
+    <mc:Fallback>
+      <p:transition spd="med">
+        <p:fade/>
+      </p:transition>
+    </mc:Fallback>
+  </mc:AlternateContent>
+  <p:timing>
+    <p:tnLst>
+      <p:par>
+        <p:cTn id="1" dur="indefinite" restart="never" nodeType="tmRoot">
+          <p:childTnLst>
+            <p:seq concurrent="1" nextAc="seek">
+              <p:cTn id="2" dur="indefinite" nodeType="mainSeq">
+                <p:childTnLst>
+                  <p:par>
+                    <p:cTn id="3" fill="hold">
+                      <p:stCondLst>
+                        <p:cond delay="indefinite"/>
+                        <p:cond evt="onBegin" delay="0">
+                          <p:tn val="2"/>
+                        </p:cond>
+                      </p:stCondLst>
+                      <p:childTnLst>
+                        <p:par>
+                          <p:cTn id="4" fill="hold">
+                            <p:stCondLst>
+                              <p:cond delay="0"/>
+                            </p:stCondLst>
+                            <p:childTnLst>
+                              <p:par>
+                                <p:cTn id="5" presetID="10" presetClass="entr" presetSubtype="0" fill="hold" nodeType="afterEffect">
+                                  <p:stCondLst>
+                                    <p:cond delay="0"/>
+                                  </p:stCondLst>
+                                  <p:childTnLst>
+                                    <p:set>
+                                      <p:cBhvr>
+                                        <p:cTn id="6" dur="1" fill="hold">
+                                          <p:stCondLst>
+                                            <p:cond delay="0"/>
+                                          </p:stCondLst>
+                                        </p:cTn>
+                                        <p:tgtEl>
+                                          <p:spTgt spid="4"/>
+                                        </p:tgtEl>
+                                        <p:attrNameLst>
+                                          <p:attrName>style.visibility</p:attrName>
+                                        </p:attrNameLst>
+                                      </p:cBhvr>
+                                      <p:to>
+                                        <p:strVal val="visible"/>
+                                      </p:to>
+                                    </p:set>
+                                    <p:animEffect transition="in" filter="fade">
+                                      <p:cBhvr>
+                                        <p:cTn id="7" dur="500"/>
+                                        <p:tgtEl>
+                                          <p:spTgt spid="4"/>
+                                        </p:tgtEl>
+                                      </p:cBhvr>
+                                    </p:animEffect>
+                                  </p:childTnLst>
+                                </p:cTn>
+                              </p:par>
+                              <p:par>
+                                <p:cTn id="8" presetID="10" presetClass="entr" presetSubtype="0" fill="hold" nodeType="withEffect">
+                                  <p:stCondLst>
+                                    <p:cond delay="300"/>
+                                  </p:stCondLst>
+                                  <p:childTnLst>
+                                    <p:set>
+                                      <p:cBhvr>
+                                        <p:cTn id="9" dur="1" fill="hold">
+                                          <p:stCondLst>
+                                            <p:cond delay="0"/>
+                                          </p:stCondLst>
+                                        </p:cTn>
+                                        <p:tgtEl>
+                                          <p:spTgt spid="6"/>
+                                        </p:tgtEl>
+                                        <p:attrNameLst>
+                                          <p:attrName>style.visibility</p:attrName>
+                                        </p:attrNameLst>
+                                      </p:cBhvr>
+                                      <p:to>
+                                        <p:strVal val="visible"/>
+                                      </p:to>
+                                    </p:set>
+                                    <p:animEffect transition="in" filter="fade">
+                                      <p:cBhvr>
+                                        <p:cTn id="10" dur="500"/>
+                                        <p:tgtEl>
+                                          <p:spTgt spid="6"/>
+                                        </p:tgtEl>
+                                      </p:cBhvr>
+                                    </p:animEffect>
+                                  </p:childTnLst>
+                                </p:cTn>
+                              </p:par>
+                              <p:par>
+                                <p:cTn id="11" presetID="10" presetClass="entr" presetSubtype="0" fill="hold" nodeType="withEffect">
+                                  <p:stCondLst>
+                                    <p:cond delay="600"/>
+                                  </p:stCondLst>
+                                  <p:childTnLst>
+                                    <p:set>
+                                      <p:cBhvr>
+                                        <p:cTn id="12" dur="1" fill="hold">
+                                          <p:stCondLst>
+                                            <p:cond delay="0"/>
+                                          </p:stCondLst>
+                                        </p:cTn>
+                                        <p:tgtEl>
+                                          <p:spTgt spid="8"/>
+                                        </p:tgtEl>
+                                        <p:attrNameLst>
+                                          <p:attrName>style.visibility</p:attrName>
+                                        </p:attrNameLst>
+                                      </p:cBhvr>
+                                      <p:to>
+                                        <p:strVal val="visible"/>
+                                      </p:to>
+                                    </p:set>
+                                    <p:animEffect transition="in" filter="fade">
+                                      <p:cBhvr>
+                                        <p:cTn id="13" dur="500"/>
+                                        <p:tgtEl>
+                                          <p:spTgt spid="8"/>
+                                        </p:tgtEl>
+                                      </p:cBhvr>
+                                    </p:animEffect>
+                                  </p:childTnLst>
+                                </p:cTn>
+                              </p:par>
+                              <p:par>
+                                <p:cTn id="14" presetID="10" presetClass="entr" presetSubtype="0" fill="hold" nodeType="withEffect">
+                                  <p:stCondLst>
+                                    <p:cond delay="900"/>
+                                  </p:stCondLst>
+                                  <p:childTnLst>
+                                    <p:set>
+                                      <p:cBhvr>
+                                        <p:cTn id="15" dur="1" fill="hold">
+                                          <p:stCondLst>
+                                            <p:cond delay="0"/>
+                                          </p:stCondLst>
+                                        </p:cTn>
+                                        <p:tgtEl>
+                                          <p:spTgt spid="20"/>
+                                        </p:tgtEl>
+                                        <p:attrNameLst>
+                                          <p:attrName>style.visibility</p:attrName>
+                                        </p:attrNameLst>
+                                      </p:cBhvr>
+                                      <p:to>
+                                        <p:strVal val="visible"/>
+                                      </p:to>
+                                    </p:set>
+                                    <p:animEffect transition="in" filter="fade">
+                                      <p:cBhvr>
+                                        <p:cTn id="16" dur="500"/>
+                                        <p:tgtEl>
+                                          <p:spTgt spid="20"/>
+                                        </p:tgtEl>
+                                      </p:cBhvr>
+                                    </p:animEffect>
+                                  </p:childTnLst>
+                                </p:cTn>
+                              </p:par>
+                              <p:par>
+                                <p:cTn id="17" presetID="10" presetClass="entr" presetSubtype="0" fill="hold" nodeType="withEffect">
+                                  <p:stCondLst>
+                                    <p:cond delay="1200"/>
+                                  </p:stCondLst>
+                                  <p:childTnLst>
+                                    <p:set>
+                                      <p:cBhvr>
+                                        <p:cTn id="18" dur="1" fill="hold">
+                                          <p:stCondLst>
+                                            <p:cond delay="0"/>
+                                          </p:stCondLst>
+                                        </p:cTn>
+                                        <p:tgtEl>
+                                          <p:spTgt spid="21"/>
+                                        </p:tgtEl>
+                                        <p:attrNameLst>
+                                          <p:attrName>style.visibility</p:attrName>
+                                        </p:attrNameLst>
+                                      </p:cBhvr>
+                                      <p:to>
+                                        <p:strVal val="visible"/>
+                                      </p:to>
+                                    </p:set>
+                                    <p:animEffect transition="in" filter="fade">
+                                      <p:cBhvr>
+                                        <p:cTn id="19" dur="500"/>
+                                        <p:tgtEl>
+                                          <p:spTgt spid="21"/>
+                                        </p:tgtEl>
+                                      </p:cBhvr>
+                                    </p:animEffect>
+                                  </p:childTnLst>
+                                </p:cTn>
+                              </p:par>
+                            </p:childTnLst>
+                          </p:cTn>
+                        </p:par>
+                      </p:childTnLst>
+                    </p:cTn>
+                  </p:par>
+                </p:childTnLst>
+              </p:cTn>
+              <p:prevCondLst>
+                <p:cond evt="onPrev" delay="0">
+                  <p:tgtEl>
+                    <p:sldTgt/>
+                  </p:tgtEl>
+                </p:cond>
+              </p:prevCondLst>
+              <p:nextCondLst>
+                <p:cond evt="onNext" delay="0">
+                  <p:tgtEl>
+                    <p:sldTgt/>
+                  </p:tgtEl>
+                </p:cond>
+              </p:nextCondLst>
+            </p:seq>
+          </p:childTnLst>
+        </p:cTn>
+      </p:par>
+    </p:tnLst>
+  </p:timing>
 </p:sld>
 </file>
 
@@ -28834,6 +32348,174 @@
   <p:clrMapOvr>
     <a:masterClrMapping/>
   </p:clrMapOvr>
+  <mc:AlternateContent xmlns:mc="http://schemas.openxmlformats.org/markup-compatibility/2006">
+    <mc:Choice xmlns:p14="http://schemas.microsoft.com/office/powerpoint/2010/main" Requires="p14">
+      <p:transition spd="med" p14:dur="700">
+        <p:fade/>
+      </p:transition>
+    </mc:Choice>
+    <mc:Fallback>
+      <p:transition spd="med">
+        <p:fade/>
+      </p:transition>
+    </mc:Fallback>
+  </mc:AlternateContent>
+  <p:timing>
+    <p:tnLst>
+      <p:par>
+        <p:cTn id="1" dur="indefinite" restart="never" nodeType="tmRoot">
+          <p:childTnLst>
+            <p:seq concurrent="1" nextAc="seek">
+              <p:cTn id="2" dur="indefinite" nodeType="mainSeq">
+                <p:childTnLst>
+                  <p:par>
+                    <p:cTn id="3" fill="hold">
+                      <p:stCondLst>
+                        <p:cond delay="indefinite"/>
+                        <p:cond evt="onBegin" delay="0">
+                          <p:tn val="2"/>
+                        </p:cond>
+                      </p:stCondLst>
+                      <p:childTnLst>
+                        <p:par>
+                          <p:cTn id="4" fill="hold">
+                            <p:stCondLst>
+                              <p:cond delay="0"/>
+                            </p:stCondLst>
+                            <p:childTnLst>
+                              <p:par>
+                                <p:cTn id="5" presetID="10" presetClass="entr" presetSubtype="0" fill="hold" nodeType="afterEffect">
+                                  <p:stCondLst>
+                                    <p:cond delay="0"/>
+                                  </p:stCondLst>
+                                  <p:childTnLst>
+                                    <p:set>
+                                      <p:cBhvr>
+                                        <p:cTn id="6" dur="1" fill="hold">
+                                          <p:stCondLst>
+                                            <p:cond delay="0"/>
+                                          </p:stCondLst>
+                                        </p:cTn>
+                                        <p:tgtEl>
+                                          <p:spTgt spid="4"/>
+                                        </p:tgtEl>
+                                        <p:attrNameLst>
+                                          <p:attrName>style.visibility</p:attrName>
+                                        </p:attrNameLst>
+                                      </p:cBhvr>
+                                      <p:to>
+                                        <p:strVal val="visible"/>
+                                      </p:to>
+                                    </p:set>
+                                    <p:animEffect transition="in" filter="fade">
+                                      <p:cBhvr>
+                                        <p:cTn id="7" dur="500"/>
+                                        <p:tgtEl>
+                                          <p:spTgt spid="4"/>
+                                        </p:tgtEl>
+                                      </p:cBhvr>
+                                    </p:animEffect>
+                                  </p:childTnLst>
+                                </p:cTn>
+                              </p:par>
+                              <p:par>
+                                <p:cTn id="8" presetID="10" presetClass="entr" presetSubtype="0" fill="hold" nodeType="withEffect">
+                                  <p:stCondLst>
+                                    <p:cond delay="300"/>
+                                  </p:stCondLst>
+                                  <p:childTnLst>
+                                    <p:set>
+                                      <p:cBhvr>
+                                        <p:cTn id="9" dur="1" fill="hold">
+                                          <p:stCondLst>
+                                            <p:cond delay="0"/>
+                                          </p:stCondLst>
+                                        </p:cTn>
+                                        <p:tgtEl>
+                                          <p:spTgt spid="29"/>
+                                        </p:tgtEl>
+                                        <p:attrNameLst>
+                                          <p:attrName>style.visibility</p:attrName>
+                                        </p:attrNameLst>
+                                      </p:cBhvr>
+                                      <p:to>
+                                        <p:strVal val="visible"/>
+                                      </p:to>
+                                    </p:set>
+                                    <p:animEffect transition="in" filter="fade">
+                                      <p:cBhvr>
+                                        <p:cTn id="10" dur="500"/>
+                                        <p:tgtEl>
+                                          <p:spTgt spid="29"/>
+                                        </p:tgtEl>
+                                      </p:cBhvr>
+                                    </p:animEffect>
+                                  </p:childTnLst>
+                                </p:cTn>
+                              </p:par>
+                              <p:par>
+                                <p:cTn id="11" presetID="10" presetClass="entr" presetSubtype="0" fill="hold" nodeType="withEffect">
+                                  <p:stCondLst>
+                                    <p:cond delay="600"/>
+                                  </p:stCondLst>
+                                  <p:childTnLst>
+                                    <p:set>
+                                      <p:cBhvr>
+                                        <p:cTn id="12" dur="1" fill="hold">
+                                          <p:stCondLst>
+                                            <p:cond delay="0"/>
+                                          </p:stCondLst>
+                                        </p:cTn>
+                                        <p:tgtEl>
+                                          <p:spTgt spid="30"/>
+                                        </p:tgtEl>
+                                        <p:attrNameLst>
+                                          <p:attrName>style.visibility</p:attrName>
+                                        </p:attrNameLst>
+                                      </p:cBhvr>
+                                      <p:to>
+                                        <p:strVal val="visible"/>
+                                      </p:to>
+                                    </p:set>
+                                    <p:animEffect transition="in" filter="fade">
+                                      <p:cBhvr>
+                                        <p:cTn id="13" dur="500"/>
+                                        <p:tgtEl>
+                                          <p:spTgt spid="30"/>
+                                        </p:tgtEl>
+                                      </p:cBhvr>
+                                    </p:animEffect>
+                                  </p:childTnLst>
+                                </p:cTn>
+                              </p:par>
+                            </p:childTnLst>
+                          </p:cTn>
+                        </p:par>
+                      </p:childTnLst>
+                    </p:cTn>
+                  </p:par>
+                </p:childTnLst>
+              </p:cTn>
+              <p:prevCondLst>
+                <p:cond evt="onPrev" delay="0">
+                  <p:tgtEl>
+                    <p:sldTgt/>
+                  </p:tgtEl>
+                </p:cond>
+              </p:prevCondLst>
+              <p:nextCondLst>
+                <p:cond evt="onNext" delay="0">
+                  <p:tgtEl>
+                    <p:sldTgt/>
+                  </p:tgtEl>
+                </p:cond>
+              </p:nextCondLst>
+            </p:seq>
+          </p:childTnLst>
+        </p:cTn>
+      </p:par>
+    </p:tnLst>
+  </p:timing>
 </p:sld>
 </file>
 
@@ -30256,6 +33938,209 @@
   <p:clrMapOvr>
     <a:masterClrMapping/>
   </p:clrMapOvr>
+  <mc:AlternateContent xmlns:mc="http://schemas.openxmlformats.org/markup-compatibility/2006">
+    <mc:Choice xmlns:p14="http://schemas.microsoft.com/office/powerpoint/2010/main" Requires="p14">
+      <p:transition spd="med" p14:dur="700">
+        <p:fade/>
+      </p:transition>
+    </mc:Choice>
+    <mc:Fallback>
+      <p:transition spd="med">
+        <p:fade/>
+      </p:transition>
+    </mc:Fallback>
+  </mc:AlternateContent>
+  <p:timing>
+    <p:tnLst>
+      <p:par>
+        <p:cTn id="1" dur="indefinite" restart="never" nodeType="tmRoot">
+          <p:childTnLst>
+            <p:seq concurrent="1" nextAc="seek">
+              <p:cTn id="2" dur="indefinite" nodeType="mainSeq">
+                <p:childTnLst>
+                  <p:par>
+                    <p:cTn id="3" fill="hold">
+                      <p:stCondLst>
+                        <p:cond delay="indefinite"/>
+                        <p:cond evt="onBegin" delay="0">
+                          <p:tn val="2"/>
+                        </p:cond>
+                      </p:stCondLst>
+                      <p:childTnLst>
+                        <p:par>
+                          <p:cTn id="4" fill="hold">
+                            <p:stCondLst>
+                              <p:cond delay="0"/>
+                            </p:stCondLst>
+                            <p:childTnLst>
+                              <p:par>
+                                <p:cTn id="5" presetID="10" presetClass="entr" presetSubtype="0" fill="hold" nodeType="afterEffect">
+                                  <p:stCondLst>
+                                    <p:cond delay="0"/>
+                                  </p:stCondLst>
+                                  <p:childTnLst>
+                                    <p:set>
+                                      <p:cBhvr>
+                                        <p:cTn id="6" dur="1" fill="hold">
+                                          <p:stCondLst>
+                                            <p:cond delay="0"/>
+                                          </p:stCondLst>
+                                        </p:cTn>
+                                        <p:tgtEl>
+                                          <p:spTgt spid="3"/>
+                                        </p:tgtEl>
+                                        <p:attrNameLst>
+                                          <p:attrName>style.visibility</p:attrName>
+                                        </p:attrNameLst>
+                                      </p:cBhvr>
+                                      <p:to>
+                                        <p:strVal val="visible"/>
+                                      </p:to>
+                                    </p:set>
+                                    <p:animEffect transition="in" filter="fade">
+                                      <p:cBhvr>
+                                        <p:cTn id="7" dur="500"/>
+                                        <p:tgtEl>
+                                          <p:spTgt spid="3"/>
+                                        </p:tgtEl>
+                                      </p:cBhvr>
+                                    </p:animEffect>
+                                  </p:childTnLst>
+                                </p:cTn>
+                              </p:par>
+                              <p:par>
+                                <p:cTn id="8" presetID="10" presetClass="entr" presetSubtype="0" fill="hold" nodeType="withEffect">
+                                  <p:stCondLst>
+                                    <p:cond delay="300"/>
+                                  </p:stCondLst>
+                                  <p:childTnLst>
+                                    <p:set>
+                                      <p:cBhvr>
+                                        <p:cTn id="9" dur="1" fill="hold">
+                                          <p:stCondLst>
+                                            <p:cond delay="0"/>
+                                          </p:stCondLst>
+                                        </p:cTn>
+                                        <p:tgtEl>
+                                          <p:spTgt spid="4"/>
+                                        </p:tgtEl>
+                                        <p:attrNameLst>
+                                          <p:attrName>style.visibility</p:attrName>
+                                        </p:attrNameLst>
+                                      </p:cBhvr>
+                                      <p:to>
+                                        <p:strVal val="visible"/>
+                                      </p:to>
+                                    </p:set>
+                                    <p:animEffect transition="in" filter="fade">
+                                      <p:cBhvr>
+                                        <p:cTn id="10" dur="500"/>
+                                        <p:tgtEl>
+                                          <p:spTgt spid="4"/>
+                                        </p:tgtEl>
+                                      </p:cBhvr>
+                                    </p:animEffect>
+                                  </p:childTnLst>
+                                </p:cTn>
+                              </p:par>
+                              <p:par>
+                                <p:cTn id="11" presetID="10" presetClass="entr" presetSubtype="0" fill="hold" nodeType="withEffect">
+                                  <p:stCondLst>
+                                    <p:cond delay="600"/>
+                                  </p:stCondLst>
+                                  <p:childTnLst>
+                                    <p:set>
+                                      <p:cBhvr>
+                                        <p:cTn id="12" dur="1" fill="hold">
+                                          <p:stCondLst>
+                                            <p:cond delay="0"/>
+                                          </p:stCondLst>
+                                        </p:cTn>
+                                        <p:tgtEl>
+                                          <p:spTgt spid="5"/>
+                                        </p:tgtEl>
+                                        <p:attrNameLst>
+                                          <p:attrName>style.visibility</p:attrName>
+                                        </p:attrNameLst>
+                                      </p:cBhvr>
+                                      <p:to>
+                                        <p:strVal val="visible"/>
+                                      </p:to>
+                                    </p:set>
+                                    <p:animEffect transition="in" filter="fade">
+                                      <p:cBhvr>
+                                        <p:cTn id="13" dur="500"/>
+                                        <p:tgtEl>
+                                          <p:spTgt spid="5"/>
+                                        </p:tgtEl>
+                                      </p:cBhvr>
+                                    </p:animEffect>
+                                  </p:childTnLst>
+                                </p:cTn>
+                              </p:par>
+                              <p:par>
+                                <p:cTn id="14" presetID="10" presetClass="entr" presetSubtype="0" fill="hold" nodeType="withEffect">
+                                  <p:stCondLst>
+                                    <p:cond delay="900"/>
+                                  </p:stCondLst>
+                                  <p:childTnLst>
+                                    <p:set>
+                                      <p:cBhvr>
+                                        <p:cTn id="15" dur="1" fill="hold">
+                                          <p:stCondLst>
+                                            <p:cond delay="0"/>
+                                          </p:stCondLst>
+                                        </p:cTn>
+                                        <p:tgtEl>
+                                          <p:spTgt spid="6"/>
+                                        </p:tgtEl>
+                                        <p:attrNameLst>
+                                          <p:attrName>style.visibility</p:attrName>
+                                        </p:attrNameLst>
+                                      </p:cBhvr>
+                                      <p:to>
+                                        <p:strVal val="visible"/>
+                                      </p:to>
+                                    </p:set>
+                                    <p:animEffect transition="in" filter="fade">
+                                      <p:cBhvr>
+                                        <p:cTn id="16" dur="500"/>
+                                        <p:tgtEl>
+                                          <p:spTgt spid="6"/>
+                                        </p:tgtEl>
+                                      </p:cBhvr>
+                                    </p:animEffect>
+                                  </p:childTnLst>
+                                </p:cTn>
+                              </p:par>
+                            </p:childTnLst>
+                          </p:cTn>
+                        </p:par>
+                      </p:childTnLst>
+                    </p:cTn>
+                  </p:par>
+                </p:childTnLst>
+              </p:cTn>
+              <p:prevCondLst>
+                <p:cond evt="onPrev" delay="0">
+                  <p:tgtEl>
+                    <p:sldTgt/>
+                  </p:tgtEl>
+                </p:cond>
+              </p:prevCondLst>
+              <p:nextCondLst>
+                <p:cond evt="onNext" delay="0">
+                  <p:tgtEl>
+                    <p:sldTgt/>
+                  </p:tgtEl>
+                </p:cond>
+              </p:nextCondLst>
+            </p:seq>
+          </p:childTnLst>
+        </p:cTn>
+      </p:par>
+    </p:tnLst>
+  </p:timing>
 </p:sld>
 </file>
 
@@ -34024,6 +37909,174 @@
   <p:clrMapOvr>
     <a:masterClrMapping/>
   </p:clrMapOvr>
+  <mc:AlternateContent xmlns:mc="http://schemas.openxmlformats.org/markup-compatibility/2006">
+    <mc:Choice xmlns:p14="http://schemas.microsoft.com/office/powerpoint/2010/main" Requires="p14">
+      <p:transition spd="med" p14:dur="700">
+        <p:fade/>
+      </p:transition>
+    </mc:Choice>
+    <mc:Fallback>
+      <p:transition spd="med">
+        <p:fade/>
+      </p:transition>
+    </mc:Fallback>
+  </mc:AlternateContent>
+  <p:timing>
+    <p:tnLst>
+      <p:par>
+        <p:cTn id="1" dur="indefinite" restart="never" nodeType="tmRoot">
+          <p:childTnLst>
+            <p:seq concurrent="1" nextAc="seek">
+              <p:cTn id="2" dur="indefinite" nodeType="mainSeq">
+                <p:childTnLst>
+                  <p:par>
+                    <p:cTn id="3" fill="hold">
+                      <p:stCondLst>
+                        <p:cond delay="indefinite"/>
+                        <p:cond evt="onBegin" delay="0">
+                          <p:tn val="2"/>
+                        </p:cond>
+                      </p:stCondLst>
+                      <p:childTnLst>
+                        <p:par>
+                          <p:cTn id="4" fill="hold">
+                            <p:stCondLst>
+                              <p:cond delay="0"/>
+                            </p:stCondLst>
+                            <p:childTnLst>
+                              <p:par>
+                                <p:cTn id="5" presetID="10" presetClass="entr" presetSubtype="0" fill="hold" nodeType="afterEffect">
+                                  <p:stCondLst>
+                                    <p:cond delay="0"/>
+                                  </p:stCondLst>
+                                  <p:childTnLst>
+                                    <p:set>
+                                      <p:cBhvr>
+                                        <p:cTn id="6" dur="1" fill="hold">
+                                          <p:stCondLst>
+                                            <p:cond delay="0"/>
+                                          </p:stCondLst>
+                                        </p:cTn>
+                                        <p:tgtEl>
+                                          <p:spTgt spid="4"/>
+                                        </p:tgtEl>
+                                        <p:attrNameLst>
+                                          <p:attrName>style.visibility</p:attrName>
+                                        </p:attrNameLst>
+                                      </p:cBhvr>
+                                      <p:to>
+                                        <p:strVal val="visible"/>
+                                      </p:to>
+                                    </p:set>
+                                    <p:animEffect transition="in" filter="fade">
+                                      <p:cBhvr>
+                                        <p:cTn id="7" dur="500"/>
+                                        <p:tgtEl>
+                                          <p:spTgt spid="4"/>
+                                        </p:tgtEl>
+                                      </p:cBhvr>
+                                    </p:animEffect>
+                                  </p:childTnLst>
+                                </p:cTn>
+                              </p:par>
+                              <p:par>
+                                <p:cTn id="8" presetID="10" presetClass="entr" presetSubtype="0" fill="hold" nodeType="withEffect">
+                                  <p:stCondLst>
+                                    <p:cond delay="300"/>
+                                  </p:stCondLst>
+                                  <p:childTnLst>
+                                    <p:set>
+                                      <p:cBhvr>
+                                        <p:cTn id="9" dur="1" fill="hold">
+                                          <p:stCondLst>
+                                            <p:cond delay="0"/>
+                                          </p:stCondLst>
+                                        </p:cTn>
+                                        <p:tgtEl>
+                                          <p:spTgt spid="126"/>
+                                        </p:tgtEl>
+                                        <p:attrNameLst>
+                                          <p:attrName>style.visibility</p:attrName>
+                                        </p:attrNameLst>
+                                      </p:cBhvr>
+                                      <p:to>
+                                        <p:strVal val="visible"/>
+                                      </p:to>
+                                    </p:set>
+                                    <p:animEffect transition="in" filter="fade">
+                                      <p:cBhvr>
+                                        <p:cTn id="10" dur="500"/>
+                                        <p:tgtEl>
+                                          <p:spTgt spid="126"/>
+                                        </p:tgtEl>
+                                      </p:cBhvr>
+                                    </p:animEffect>
+                                  </p:childTnLst>
+                                </p:cTn>
+                              </p:par>
+                              <p:par>
+                                <p:cTn id="11" presetID="10" presetClass="entr" presetSubtype="0" fill="hold" nodeType="withEffect">
+                                  <p:stCondLst>
+                                    <p:cond delay="600"/>
+                                  </p:stCondLst>
+                                  <p:childTnLst>
+                                    <p:set>
+                                      <p:cBhvr>
+                                        <p:cTn id="12" dur="1" fill="hold">
+                                          <p:stCondLst>
+                                            <p:cond delay="0"/>
+                                          </p:stCondLst>
+                                        </p:cTn>
+                                        <p:tgtEl>
+                                          <p:spTgt spid="127"/>
+                                        </p:tgtEl>
+                                        <p:attrNameLst>
+                                          <p:attrName>style.visibility</p:attrName>
+                                        </p:attrNameLst>
+                                      </p:cBhvr>
+                                      <p:to>
+                                        <p:strVal val="visible"/>
+                                      </p:to>
+                                    </p:set>
+                                    <p:animEffect transition="in" filter="fade">
+                                      <p:cBhvr>
+                                        <p:cTn id="13" dur="500"/>
+                                        <p:tgtEl>
+                                          <p:spTgt spid="127"/>
+                                        </p:tgtEl>
+                                      </p:cBhvr>
+                                    </p:animEffect>
+                                  </p:childTnLst>
+                                </p:cTn>
+                              </p:par>
+                            </p:childTnLst>
+                          </p:cTn>
+                        </p:par>
+                      </p:childTnLst>
+                    </p:cTn>
+                  </p:par>
+                </p:childTnLst>
+              </p:cTn>
+              <p:prevCondLst>
+                <p:cond evt="onPrev" delay="0">
+                  <p:tgtEl>
+                    <p:sldTgt/>
+                  </p:tgtEl>
+                </p:cond>
+              </p:prevCondLst>
+              <p:nextCondLst>
+                <p:cond evt="onNext" delay="0">
+                  <p:tgtEl>
+                    <p:sldTgt/>
+                  </p:tgtEl>
+                </p:cond>
+              </p:nextCondLst>
+            </p:seq>
+          </p:childTnLst>
+        </p:cTn>
+      </p:par>
+    </p:tnLst>
+  </p:timing>
 </p:sld>
 </file>
 
@@ -36024,6 +40077,174 @@
   <p:clrMapOvr>
     <a:masterClrMapping/>
   </p:clrMapOvr>
+  <mc:AlternateContent xmlns:mc="http://schemas.openxmlformats.org/markup-compatibility/2006">
+    <mc:Choice xmlns:p14="http://schemas.microsoft.com/office/powerpoint/2010/main" Requires="p14">
+      <p:transition spd="med" p14:dur="700">
+        <p:fade/>
+      </p:transition>
+    </mc:Choice>
+    <mc:Fallback>
+      <p:transition spd="med">
+        <p:fade/>
+      </p:transition>
+    </mc:Fallback>
+  </mc:AlternateContent>
+  <p:timing>
+    <p:tnLst>
+      <p:par>
+        <p:cTn id="1" dur="indefinite" restart="never" nodeType="tmRoot">
+          <p:childTnLst>
+            <p:seq concurrent="1" nextAc="seek">
+              <p:cTn id="2" dur="indefinite" nodeType="mainSeq">
+                <p:childTnLst>
+                  <p:par>
+                    <p:cTn id="3" fill="hold">
+                      <p:stCondLst>
+                        <p:cond delay="indefinite"/>
+                        <p:cond evt="onBegin" delay="0">
+                          <p:tn val="2"/>
+                        </p:cond>
+                      </p:stCondLst>
+                      <p:childTnLst>
+                        <p:par>
+                          <p:cTn id="4" fill="hold">
+                            <p:stCondLst>
+                              <p:cond delay="0"/>
+                            </p:stCondLst>
+                            <p:childTnLst>
+                              <p:par>
+                                <p:cTn id="5" presetID="10" presetClass="entr" presetSubtype="0" fill="hold" nodeType="afterEffect">
+                                  <p:stCondLst>
+                                    <p:cond delay="0"/>
+                                  </p:stCondLst>
+                                  <p:childTnLst>
+                                    <p:set>
+                                      <p:cBhvr>
+                                        <p:cTn id="6" dur="1" fill="hold">
+                                          <p:stCondLst>
+                                            <p:cond delay="0"/>
+                                          </p:stCondLst>
+                                        </p:cTn>
+                                        <p:tgtEl>
+                                          <p:spTgt spid="4"/>
+                                        </p:tgtEl>
+                                        <p:attrNameLst>
+                                          <p:attrName>style.visibility</p:attrName>
+                                        </p:attrNameLst>
+                                      </p:cBhvr>
+                                      <p:to>
+                                        <p:strVal val="visible"/>
+                                      </p:to>
+                                    </p:set>
+                                    <p:animEffect transition="in" filter="fade">
+                                      <p:cBhvr>
+                                        <p:cTn id="7" dur="500"/>
+                                        <p:tgtEl>
+                                          <p:spTgt spid="4"/>
+                                        </p:tgtEl>
+                                      </p:cBhvr>
+                                    </p:animEffect>
+                                  </p:childTnLst>
+                                </p:cTn>
+                              </p:par>
+                              <p:par>
+                                <p:cTn id="8" presetID="10" presetClass="entr" presetSubtype="0" fill="hold" nodeType="withEffect">
+                                  <p:stCondLst>
+                                    <p:cond delay="300"/>
+                                  </p:stCondLst>
+                                  <p:childTnLst>
+                                    <p:set>
+                                      <p:cBhvr>
+                                        <p:cTn id="9" dur="1" fill="hold">
+                                          <p:stCondLst>
+                                            <p:cond delay="0"/>
+                                          </p:stCondLst>
+                                        </p:cTn>
+                                        <p:tgtEl>
+                                          <p:spTgt spid="66"/>
+                                        </p:tgtEl>
+                                        <p:attrNameLst>
+                                          <p:attrName>style.visibility</p:attrName>
+                                        </p:attrNameLst>
+                                      </p:cBhvr>
+                                      <p:to>
+                                        <p:strVal val="visible"/>
+                                      </p:to>
+                                    </p:set>
+                                    <p:animEffect transition="in" filter="fade">
+                                      <p:cBhvr>
+                                        <p:cTn id="10" dur="500"/>
+                                        <p:tgtEl>
+                                          <p:spTgt spid="66"/>
+                                        </p:tgtEl>
+                                      </p:cBhvr>
+                                    </p:animEffect>
+                                  </p:childTnLst>
+                                </p:cTn>
+                              </p:par>
+                              <p:par>
+                                <p:cTn id="11" presetID="10" presetClass="entr" presetSubtype="0" fill="hold" nodeType="withEffect">
+                                  <p:stCondLst>
+                                    <p:cond delay="600"/>
+                                  </p:stCondLst>
+                                  <p:childTnLst>
+                                    <p:set>
+                                      <p:cBhvr>
+                                        <p:cTn id="12" dur="1" fill="hold">
+                                          <p:stCondLst>
+                                            <p:cond delay="0"/>
+                                          </p:stCondLst>
+                                        </p:cTn>
+                                        <p:tgtEl>
+                                          <p:spTgt spid="67"/>
+                                        </p:tgtEl>
+                                        <p:attrNameLst>
+                                          <p:attrName>style.visibility</p:attrName>
+                                        </p:attrNameLst>
+                                      </p:cBhvr>
+                                      <p:to>
+                                        <p:strVal val="visible"/>
+                                      </p:to>
+                                    </p:set>
+                                    <p:animEffect transition="in" filter="fade">
+                                      <p:cBhvr>
+                                        <p:cTn id="13" dur="500"/>
+                                        <p:tgtEl>
+                                          <p:spTgt spid="67"/>
+                                        </p:tgtEl>
+                                      </p:cBhvr>
+                                    </p:animEffect>
+                                  </p:childTnLst>
+                                </p:cTn>
+                              </p:par>
+                            </p:childTnLst>
+                          </p:cTn>
+                        </p:par>
+                      </p:childTnLst>
+                    </p:cTn>
+                  </p:par>
+                </p:childTnLst>
+              </p:cTn>
+              <p:prevCondLst>
+                <p:cond evt="onPrev" delay="0">
+                  <p:tgtEl>
+                    <p:sldTgt/>
+                  </p:tgtEl>
+                </p:cond>
+              </p:prevCondLst>
+              <p:nextCondLst>
+                <p:cond evt="onNext" delay="0">
+                  <p:tgtEl>
+                    <p:sldTgt/>
+                  </p:tgtEl>
+                </p:cond>
+              </p:nextCondLst>
+            </p:seq>
+          </p:childTnLst>
+        </p:cTn>
+      </p:par>
+    </p:tnLst>
+  </p:timing>
 </p:sld>
 </file>
 
@@ -39145,6 +43366,174 @@
   <p:clrMapOvr>
     <a:masterClrMapping/>
   </p:clrMapOvr>
+  <mc:AlternateContent xmlns:mc="http://schemas.openxmlformats.org/markup-compatibility/2006">
+    <mc:Choice xmlns:p14="http://schemas.microsoft.com/office/powerpoint/2010/main" Requires="p14">
+      <p:transition spd="med" p14:dur="700">
+        <p:fade/>
+      </p:transition>
+    </mc:Choice>
+    <mc:Fallback>
+      <p:transition spd="med">
+        <p:fade/>
+      </p:transition>
+    </mc:Fallback>
+  </mc:AlternateContent>
+  <p:timing>
+    <p:tnLst>
+      <p:par>
+        <p:cTn id="1" dur="indefinite" restart="never" nodeType="tmRoot">
+          <p:childTnLst>
+            <p:seq concurrent="1" nextAc="seek">
+              <p:cTn id="2" dur="indefinite" nodeType="mainSeq">
+                <p:childTnLst>
+                  <p:par>
+                    <p:cTn id="3" fill="hold">
+                      <p:stCondLst>
+                        <p:cond delay="indefinite"/>
+                        <p:cond evt="onBegin" delay="0">
+                          <p:tn val="2"/>
+                        </p:cond>
+                      </p:stCondLst>
+                      <p:childTnLst>
+                        <p:par>
+                          <p:cTn id="4" fill="hold">
+                            <p:stCondLst>
+                              <p:cond delay="0"/>
+                            </p:stCondLst>
+                            <p:childTnLst>
+                              <p:par>
+                                <p:cTn id="5" presetID="10" presetClass="entr" presetSubtype="0" fill="hold" nodeType="afterEffect">
+                                  <p:stCondLst>
+                                    <p:cond delay="0"/>
+                                  </p:stCondLst>
+                                  <p:childTnLst>
+                                    <p:set>
+                                      <p:cBhvr>
+                                        <p:cTn id="6" dur="1" fill="hold">
+                                          <p:stCondLst>
+                                            <p:cond delay="0"/>
+                                          </p:stCondLst>
+                                        </p:cTn>
+                                        <p:tgtEl>
+                                          <p:spTgt spid="4"/>
+                                        </p:tgtEl>
+                                        <p:attrNameLst>
+                                          <p:attrName>style.visibility</p:attrName>
+                                        </p:attrNameLst>
+                                      </p:cBhvr>
+                                      <p:to>
+                                        <p:strVal val="visible"/>
+                                      </p:to>
+                                    </p:set>
+                                    <p:animEffect transition="in" filter="fade">
+                                      <p:cBhvr>
+                                        <p:cTn id="7" dur="500"/>
+                                        <p:tgtEl>
+                                          <p:spTgt spid="4"/>
+                                        </p:tgtEl>
+                                      </p:cBhvr>
+                                    </p:animEffect>
+                                  </p:childTnLst>
+                                </p:cTn>
+                              </p:par>
+                              <p:par>
+                                <p:cTn id="8" presetID="10" presetClass="entr" presetSubtype="0" fill="hold" nodeType="withEffect">
+                                  <p:stCondLst>
+                                    <p:cond delay="300"/>
+                                  </p:stCondLst>
+                                  <p:childTnLst>
+                                    <p:set>
+                                      <p:cBhvr>
+                                        <p:cTn id="9" dur="1" fill="hold">
+                                          <p:stCondLst>
+                                            <p:cond delay="0"/>
+                                          </p:stCondLst>
+                                        </p:cTn>
+                                        <p:tgtEl>
+                                          <p:spTgt spid="98"/>
+                                        </p:tgtEl>
+                                        <p:attrNameLst>
+                                          <p:attrName>style.visibility</p:attrName>
+                                        </p:attrNameLst>
+                                      </p:cBhvr>
+                                      <p:to>
+                                        <p:strVal val="visible"/>
+                                      </p:to>
+                                    </p:set>
+                                    <p:animEffect transition="in" filter="fade">
+                                      <p:cBhvr>
+                                        <p:cTn id="10" dur="500"/>
+                                        <p:tgtEl>
+                                          <p:spTgt spid="98"/>
+                                        </p:tgtEl>
+                                      </p:cBhvr>
+                                    </p:animEffect>
+                                  </p:childTnLst>
+                                </p:cTn>
+                              </p:par>
+                              <p:par>
+                                <p:cTn id="11" presetID="10" presetClass="entr" presetSubtype="0" fill="hold" nodeType="withEffect">
+                                  <p:stCondLst>
+                                    <p:cond delay="600"/>
+                                  </p:stCondLst>
+                                  <p:childTnLst>
+                                    <p:set>
+                                      <p:cBhvr>
+                                        <p:cTn id="12" dur="1" fill="hold">
+                                          <p:stCondLst>
+                                            <p:cond delay="0"/>
+                                          </p:stCondLst>
+                                        </p:cTn>
+                                        <p:tgtEl>
+                                          <p:spTgt spid="99"/>
+                                        </p:tgtEl>
+                                        <p:attrNameLst>
+                                          <p:attrName>style.visibility</p:attrName>
+                                        </p:attrNameLst>
+                                      </p:cBhvr>
+                                      <p:to>
+                                        <p:strVal val="visible"/>
+                                      </p:to>
+                                    </p:set>
+                                    <p:animEffect transition="in" filter="fade">
+                                      <p:cBhvr>
+                                        <p:cTn id="13" dur="500"/>
+                                        <p:tgtEl>
+                                          <p:spTgt spid="99"/>
+                                        </p:tgtEl>
+                                      </p:cBhvr>
+                                    </p:animEffect>
+                                  </p:childTnLst>
+                                </p:cTn>
+                              </p:par>
+                            </p:childTnLst>
+                          </p:cTn>
+                        </p:par>
+                      </p:childTnLst>
+                    </p:cTn>
+                  </p:par>
+                </p:childTnLst>
+              </p:cTn>
+              <p:prevCondLst>
+                <p:cond evt="onPrev" delay="0">
+                  <p:tgtEl>
+                    <p:sldTgt/>
+                  </p:tgtEl>
+                </p:cond>
+              </p:prevCondLst>
+              <p:nextCondLst>
+                <p:cond evt="onNext" delay="0">
+                  <p:tgtEl>
+                    <p:sldTgt/>
+                  </p:tgtEl>
+                </p:cond>
+              </p:nextCondLst>
+            </p:seq>
+          </p:childTnLst>
+        </p:cTn>
+      </p:par>
+    </p:tnLst>
+  </p:timing>
 </p:sld>
 </file>
 
@@ -40795,6 +45184,174 @@
   <p:clrMapOvr>
     <a:masterClrMapping/>
   </p:clrMapOvr>
+  <mc:AlternateContent xmlns:mc="http://schemas.openxmlformats.org/markup-compatibility/2006">
+    <mc:Choice xmlns:p14="http://schemas.microsoft.com/office/powerpoint/2010/main" Requires="p14">
+      <p:transition spd="med" p14:dur="700">
+        <p:fade/>
+      </p:transition>
+    </mc:Choice>
+    <mc:Fallback>
+      <p:transition spd="med">
+        <p:fade/>
+      </p:transition>
+    </mc:Fallback>
+  </mc:AlternateContent>
+  <p:timing>
+    <p:tnLst>
+      <p:par>
+        <p:cTn id="1" dur="indefinite" restart="never" nodeType="tmRoot">
+          <p:childTnLst>
+            <p:seq concurrent="1" nextAc="seek">
+              <p:cTn id="2" dur="indefinite" nodeType="mainSeq">
+                <p:childTnLst>
+                  <p:par>
+                    <p:cTn id="3" fill="hold">
+                      <p:stCondLst>
+                        <p:cond delay="indefinite"/>
+                        <p:cond evt="onBegin" delay="0">
+                          <p:tn val="2"/>
+                        </p:cond>
+                      </p:stCondLst>
+                      <p:childTnLst>
+                        <p:par>
+                          <p:cTn id="4" fill="hold">
+                            <p:stCondLst>
+                              <p:cond delay="0"/>
+                            </p:stCondLst>
+                            <p:childTnLst>
+                              <p:par>
+                                <p:cTn id="5" presetID="10" presetClass="entr" presetSubtype="0" fill="hold" nodeType="afterEffect">
+                                  <p:stCondLst>
+                                    <p:cond delay="0"/>
+                                  </p:stCondLst>
+                                  <p:childTnLst>
+                                    <p:set>
+                                      <p:cBhvr>
+                                        <p:cTn id="6" dur="1" fill="hold">
+                                          <p:stCondLst>
+                                            <p:cond delay="0"/>
+                                          </p:stCondLst>
+                                        </p:cTn>
+                                        <p:tgtEl>
+                                          <p:spTgt spid="4"/>
+                                        </p:tgtEl>
+                                        <p:attrNameLst>
+                                          <p:attrName>style.visibility</p:attrName>
+                                        </p:attrNameLst>
+                                      </p:cBhvr>
+                                      <p:to>
+                                        <p:strVal val="visible"/>
+                                      </p:to>
+                                    </p:set>
+                                    <p:animEffect transition="in" filter="fade">
+                                      <p:cBhvr>
+                                        <p:cTn id="7" dur="500"/>
+                                        <p:tgtEl>
+                                          <p:spTgt spid="4"/>
+                                        </p:tgtEl>
+                                      </p:cBhvr>
+                                    </p:animEffect>
+                                  </p:childTnLst>
+                                </p:cTn>
+                              </p:par>
+                              <p:par>
+                                <p:cTn id="8" presetID="10" presetClass="entr" presetSubtype="0" fill="hold" nodeType="withEffect">
+                                  <p:stCondLst>
+                                    <p:cond delay="300"/>
+                                  </p:stCondLst>
+                                  <p:childTnLst>
+                                    <p:set>
+                                      <p:cBhvr>
+                                        <p:cTn id="9" dur="1" fill="hold">
+                                          <p:stCondLst>
+                                            <p:cond delay="0"/>
+                                          </p:stCondLst>
+                                        </p:cTn>
+                                        <p:tgtEl>
+                                          <p:spTgt spid="52"/>
+                                        </p:tgtEl>
+                                        <p:attrNameLst>
+                                          <p:attrName>style.visibility</p:attrName>
+                                        </p:attrNameLst>
+                                      </p:cBhvr>
+                                      <p:to>
+                                        <p:strVal val="visible"/>
+                                      </p:to>
+                                    </p:set>
+                                    <p:animEffect transition="in" filter="fade">
+                                      <p:cBhvr>
+                                        <p:cTn id="10" dur="500"/>
+                                        <p:tgtEl>
+                                          <p:spTgt spid="52"/>
+                                        </p:tgtEl>
+                                      </p:cBhvr>
+                                    </p:animEffect>
+                                  </p:childTnLst>
+                                </p:cTn>
+                              </p:par>
+                              <p:par>
+                                <p:cTn id="11" presetID="10" presetClass="entr" presetSubtype="0" fill="hold" nodeType="withEffect">
+                                  <p:stCondLst>
+                                    <p:cond delay="600"/>
+                                  </p:stCondLst>
+                                  <p:childTnLst>
+                                    <p:set>
+                                      <p:cBhvr>
+                                        <p:cTn id="12" dur="1" fill="hold">
+                                          <p:stCondLst>
+                                            <p:cond delay="0"/>
+                                          </p:stCondLst>
+                                        </p:cTn>
+                                        <p:tgtEl>
+                                          <p:spTgt spid="53"/>
+                                        </p:tgtEl>
+                                        <p:attrNameLst>
+                                          <p:attrName>style.visibility</p:attrName>
+                                        </p:attrNameLst>
+                                      </p:cBhvr>
+                                      <p:to>
+                                        <p:strVal val="visible"/>
+                                      </p:to>
+                                    </p:set>
+                                    <p:animEffect transition="in" filter="fade">
+                                      <p:cBhvr>
+                                        <p:cTn id="13" dur="500"/>
+                                        <p:tgtEl>
+                                          <p:spTgt spid="53"/>
+                                        </p:tgtEl>
+                                      </p:cBhvr>
+                                    </p:animEffect>
+                                  </p:childTnLst>
+                                </p:cTn>
+                              </p:par>
+                            </p:childTnLst>
+                          </p:cTn>
+                        </p:par>
+                      </p:childTnLst>
+                    </p:cTn>
+                  </p:par>
+                </p:childTnLst>
+              </p:cTn>
+              <p:prevCondLst>
+                <p:cond evt="onPrev" delay="0">
+                  <p:tgtEl>
+                    <p:sldTgt/>
+                  </p:tgtEl>
+                </p:cond>
+              </p:prevCondLst>
+              <p:nextCondLst>
+                <p:cond evt="onNext" delay="0">
+                  <p:tgtEl>
+                    <p:sldTgt/>
+                  </p:tgtEl>
+                </p:cond>
+              </p:nextCondLst>
+            </p:seq>
+          </p:childTnLst>
+        </p:cTn>
+      </p:par>
+    </p:tnLst>
+  </p:timing>
 </p:sld>
 </file>
 
@@ -42536,6 +47093,244 @@
   <p:clrMapOvr>
     <a:masterClrMapping/>
   </p:clrMapOvr>
+  <mc:AlternateContent xmlns:mc="http://schemas.openxmlformats.org/markup-compatibility/2006">
+    <mc:Choice xmlns:p14="http://schemas.microsoft.com/office/powerpoint/2010/main" Requires="p14">
+      <p:transition spd="med" p14:dur="700">
+        <p:fade/>
+      </p:transition>
+    </mc:Choice>
+    <mc:Fallback>
+      <p:transition spd="med">
+        <p:fade/>
+      </p:transition>
+    </mc:Fallback>
+  </mc:AlternateContent>
+  <p:timing>
+    <p:tnLst>
+      <p:par>
+        <p:cTn id="1" dur="indefinite" restart="never" nodeType="tmRoot">
+          <p:childTnLst>
+            <p:seq concurrent="1" nextAc="seek">
+              <p:cTn id="2" dur="indefinite" nodeType="mainSeq">
+                <p:childTnLst>
+                  <p:par>
+                    <p:cTn id="3" fill="hold">
+                      <p:stCondLst>
+                        <p:cond delay="indefinite"/>
+                        <p:cond evt="onBegin" delay="0">
+                          <p:tn val="2"/>
+                        </p:cond>
+                      </p:stCondLst>
+                      <p:childTnLst>
+                        <p:par>
+                          <p:cTn id="4" fill="hold">
+                            <p:stCondLst>
+                              <p:cond delay="0"/>
+                            </p:stCondLst>
+                            <p:childTnLst>
+                              <p:par>
+                                <p:cTn id="5" presetID="10" presetClass="entr" presetSubtype="0" fill="hold" nodeType="afterEffect">
+                                  <p:stCondLst>
+                                    <p:cond delay="0"/>
+                                  </p:stCondLst>
+                                  <p:childTnLst>
+                                    <p:set>
+                                      <p:cBhvr>
+                                        <p:cTn id="6" dur="1" fill="hold">
+                                          <p:stCondLst>
+                                            <p:cond delay="0"/>
+                                          </p:stCondLst>
+                                        </p:cTn>
+                                        <p:tgtEl>
+                                          <p:spTgt spid="4"/>
+                                        </p:tgtEl>
+                                        <p:attrNameLst>
+                                          <p:attrName>style.visibility</p:attrName>
+                                        </p:attrNameLst>
+                                      </p:cBhvr>
+                                      <p:to>
+                                        <p:strVal val="visible"/>
+                                      </p:to>
+                                    </p:set>
+                                    <p:animEffect transition="in" filter="fade">
+                                      <p:cBhvr>
+                                        <p:cTn id="7" dur="500"/>
+                                        <p:tgtEl>
+                                          <p:spTgt spid="4"/>
+                                        </p:tgtEl>
+                                      </p:cBhvr>
+                                    </p:animEffect>
+                                  </p:childTnLst>
+                                </p:cTn>
+                              </p:par>
+                              <p:par>
+                                <p:cTn id="8" presetID="10" presetClass="entr" presetSubtype="0" fill="hold" nodeType="withEffect">
+                                  <p:stCondLst>
+                                    <p:cond delay="300"/>
+                                  </p:stCondLst>
+                                  <p:childTnLst>
+                                    <p:set>
+                                      <p:cBhvr>
+                                        <p:cTn id="9" dur="1" fill="hold">
+                                          <p:stCondLst>
+                                            <p:cond delay="0"/>
+                                          </p:stCondLst>
+                                        </p:cTn>
+                                        <p:tgtEl>
+                                          <p:spTgt spid="47"/>
+                                        </p:tgtEl>
+                                        <p:attrNameLst>
+                                          <p:attrName>style.visibility</p:attrName>
+                                        </p:attrNameLst>
+                                      </p:cBhvr>
+                                      <p:to>
+                                        <p:strVal val="visible"/>
+                                      </p:to>
+                                    </p:set>
+                                    <p:animEffect transition="in" filter="fade">
+                                      <p:cBhvr>
+                                        <p:cTn id="10" dur="500"/>
+                                        <p:tgtEl>
+                                          <p:spTgt spid="47"/>
+                                        </p:tgtEl>
+                                      </p:cBhvr>
+                                    </p:animEffect>
+                                  </p:childTnLst>
+                                </p:cTn>
+                              </p:par>
+                              <p:par>
+                                <p:cTn id="11" presetID="10" presetClass="entr" presetSubtype="0" fill="hold" nodeType="withEffect">
+                                  <p:stCondLst>
+                                    <p:cond delay="600"/>
+                                  </p:stCondLst>
+                                  <p:childTnLst>
+                                    <p:set>
+                                      <p:cBhvr>
+                                        <p:cTn id="12" dur="1" fill="hold">
+                                          <p:stCondLst>
+                                            <p:cond delay="0"/>
+                                          </p:stCondLst>
+                                        </p:cTn>
+                                        <p:tgtEl>
+                                          <p:spTgt spid="49"/>
+                                        </p:tgtEl>
+                                        <p:attrNameLst>
+                                          <p:attrName>style.visibility</p:attrName>
+                                        </p:attrNameLst>
+                                      </p:cBhvr>
+                                      <p:to>
+                                        <p:strVal val="visible"/>
+                                      </p:to>
+                                    </p:set>
+                                    <p:animEffect transition="in" filter="fade">
+                                      <p:cBhvr>
+                                        <p:cTn id="13" dur="500"/>
+                                        <p:tgtEl>
+                                          <p:spTgt spid="49"/>
+                                        </p:tgtEl>
+                                      </p:cBhvr>
+                                    </p:animEffect>
+                                  </p:childTnLst>
+                                </p:cTn>
+                              </p:par>
+                              <p:par>
+                                <p:cTn id="14" presetID="10" presetClass="entr" presetSubtype="0" fill="hold" nodeType="withEffect">
+                                  <p:stCondLst>
+                                    <p:cond delay="900"/>
+                                  </p:stCondLst>
+                                  <p:childTnLst>
+                                    <p:set>
+                                      <p:cBhvr>
+                                        <p:cTn id="15" dur="1" fill="hold">
+                                          <p:stCondLst>
+                                            <p:cond delay="0"/>
+                                          </p:stCondLst>
+                                        </p:cTn>
+                                        <p:tgtEl>
+                                          <p:spTgt spid="50"/>
+                                        </p:tgtEl>
+                                        <p:attrNameLst>
+                                          <p:attrName>style.visibility</p:attrName>
+                                        </p:attrNameLst>
+                                      </p:cBhvr>
+                                      <p:to>
+                                        <p:strVal val="visible"/>
+                                      </p:to>
+                                    </p:set>
+                                    <p:animEffect transition="in" filter="fade">
+                                      <p:cBhvr>
+                                        <p:cTn id="16" dur="500"/>
+                                        <p:tgtEl>
+                                          <p:spTgt spid="50"/>
+                                        </p:tgtEl>
+                                      </p:cBhvr>
+                                    </p:animEffect>
+                                  </p:childTnLst>
+                                </p:cTn>
+                              </p:par>
+                              <p:par>
+                                <p:cTn id="17" presetID="10" presetClass="entr" presetSubtype="0" fill="hold" nodeType="withEffect">
+                                  <p:stCondLst>
+                                    <p:cond delay="1200"/>
+                                  </p:stCondLst>
+                                  <p:childTnLst>
+                                    <p:set>
+                                      <p:cBhvr>
+                                        <p:cTn id="18" dur="1" fill="hold">
+                                          <p:stCondLst>
+                                            <p:cond delay="0"/>
+                                          </p:stCondLst>
+                                        </p:cTn>
+                                        <p:tgtEl>
+                                          <p:spTgt spid="51"/>
+                                        </p:tgtEl>
+                                        <p:attrNameLst>
+                                          <p:attrName>style.visibility</p:attrName>
+                                        </p:attrNameLst>
+                                      </p:cBhvr>
+                                      <p:to>
+                                        <p:strVal val="visible"/>
+                                      </p:to>
+                                    </p:set>
+                                    <p:animEffect transition="in" filter="fade">
+                                      <p:cBhvr>
+                                        <p:cTn id="19" dur="500"/>
+                                        <p:tgtEl>
+                                          <p:spTgt spid="51"/>
+                                        </p:tgtEl>
+                                      </p:cBhvr>
+                                    </p:animEffect>
+                                  </p:childTnLst>
+                                </p:cTn>
+                              </p:par>
+                            </p:childTnLst>
+                          </p:cTn>
+                        </p:par>
+                      </p:childTnLst>
+                    </p:cTn>
+                  </p:par>
+                </p:childTnLst>
+              </p:cTn>
+              <p:prevCondLst>
+                <p:cond evt="onPrev" delay="0">
+                  <p:tgtEl>
+                    <p:sldTgt/>
+                  </p:tgtEl>
+                </p:cond>
+              </p:prevCondLst>
+              <p:nextCondLst>
+                <p:cond evt="onNext" delay="0">
+                  <p:tgtEl>
+                    <p:sldTgt/>
+                  </p:tgtEl>
+                </p:cond>
+              </p:nextCondLst>
+            </p:seq>
+          </p:childTnLst>
+        </p:cTn>
+      </p:par>
+    </p:tnLst>
+  </p:timing>
 </p:sld>
 </file>
 
@@ -44080,6 +48875,174 @@
   <p:clrMapOvr>
     <a:masterClrMapping/>
   </p:clrMapOvr>
+  <mc:AlternateContent xmlns:mc="http://schemas.openxmlformats.org/markup-compatibility/2006">
+    <mc:Choice xmlns:p14="http://schemas.microsoft.com/office/powerpoint/2010/main" Requires="p14">
+      <p:transition spd="med" p14:dur="700">
+        <p:fade/>
+      </p:transition>
+    </mc:Choice>
+    <mc:Fallback>
+      <p:transition spd="med">
+        <p:fade/>
+      </p:transition>
+    </mc:Fallback>
+  </mc:AlternateContent>
+  <p:timing>
+    <p:tnLst>
+      <p:par>
+        <p:cTn id="1" dur="indefinite" restart="never" nodeType="tmRoot">
+          <p:childTnLst>
+            <p:seq concurrent="1" nextAc="seek">
+              <p:cTn id="2" dur="indefinite" nodeType="mainSeq">
+                <p:childTnLst>
+                  <p:par>
+                    <p:cTn id="3" fill="hold">
+                      <p:stCondLst>
+                        <p:cond delay="indefinite"/>
+                        <p:cond evt="onBegin" delay="0">
+                          <p:tn val="2"/>
+                        </p:cond>
+                      </p:stCondLst>
+                      <p:childTnLst>
+                        <p:par>
+                          <p:cTn id="4" fill="hold">
+                            <p:stCondLst>
+                              <p:cond delay="0"/>
+                            </p:stCondLst>
+                            <p:childTnLst>
+                              <p:par>
+                                <p:cTn id="5" presetID="10" presetClass="entr" presetSubtype="0" fill="hold" nodeType="afterEffect">
+                                  <p:stCondLst>
+                                    <p:cond delay="0"/>
+                                  </p:stCondLst>
+                                  <p:childTnLst>
+                                    <p:set>
+                                      <p:cBhvr>
+                                        <p:cTn id="6" dur="1" fill="hold">
+                                          <p:stCondLst>
+                                            <p:cond delay="0"/>
+                                          </p:stCondLst>
+                                        </p:cTn>
+                                        <p:tgtEl>
+                                          <p:spTgt spid="4"/>
+                                        </p:tgtEl>
+                                        <p:attrNameLst>
+                                          <p:attrName>style.visibility</p:attrName>
+                                        </p:attrNameLst>
+                                      </p:cBhvr>
+                                      <p:to>
+                                        <p:strVal val="visible"/>
+                                      </p:to>
+                                    </p:set>
+                                    <p:animEffect transition="in" filter="fade">
+                                      <p:cBhvr>
+                                        <p:cTn id="7" dur="500"/>
+                                        <p:tgtEl>
+                                          <p:spTgt spid="4"/>
+                                        </p:tgtEl>
+                                      </p:cBhvr>
+                                    </p:animEffect>
+                                  </p:childTnLst>
+                                </p:cTn>
+                              </p:par>
+                              <p:par>
+                                <p:cTn id="8" presetID="10" presetClass="entr" presetSubtype="0" fill="hold" nodeType="withEffect">
+                                  <p:stCondLst>
+                                    <p:cond delay="300"/>
+                                  </p:stCondLst>
+                                  <p:childTnLst>
+                                    <p:set>
+                                      <p:cBhvr>
+                                        <p:cTn id="9" dur="1" fill="hold">
+                                          <p:stCondLst>
+                                            <p:cond delay="0"/>
+                                          </p:stCondLst>
+                                        </p:cTn>
+                                        <p:tgtEl>
+                                          <p:spTgt spid="46"/>
+                                        </p:tgtEl>
+                                        <p:attrNameLst>
+                                          <p:attrName>style.visibility</p:attrName>
+                                        </p:attrNameLst>
+                                      </p:cBhvr>
+                                      <p:to>
+                                        <p:strVal val="visible"/>
+                                      </p:to>
+                                    </p:set>
+                                    <p:animEffect transition="in" filter="fade">
+                                      <p:cBhvr>
+                                        <p:cTn id="10" dur="500"/>
+                                        <p:tgtEl>
+                                          <p:spTgt spid="46"/>
+                                        </p:tgtEl>
+                                      </p:cBhvr>
+                                    </p:animEffect>
+                                  </p:childTnLst>
+                                </p:cTn>
+                              </p:par>
+                              <p:par>
+                                <p:cTn id="11" presetID="10" presetClass="entr" presetSubtype="0" fill="hold" nodeType="withEffect">
+                                  <p:stCondLst>
+                                    <p:cond delay="600"/>
+                                  </p:stCondLst>
+                                  <p:childTnLst>
+                                    <p:set>
+                                      <p:cBhvr>
+                                        <p:cTn id="12" dur="1" fill="hold">
+                                          <p:stCondLst>
+                                            <p:cond delay="0"/>
+                                          </p:stCondLst>
+                                        </p:cTn>
+                                        <p:tgtEl>
+                                          <p:spTgt spid="47"/>
+                                        </p:tgtEl>
+                                        <p:attrNameLst>
+                                          <p:attrName>style.visibility</p:attrName>
+                                        </p:attrNameLst>
+                                      </p:cBhvr>
+                                      <p:to>
+                                        <p:strVal val="visible"/>
+                                      </p:to>
+                                    </p:set>
+                                    <p:animEffect transition="in" filter="fade">
+                                      <p:cBhvr>
+                                        <p:cTn id="13" dur="500"/>
+                                        <p:tgtEl>
+                                          <p:spTgt spid="47"/>
+                                        </p:tgtEl>
+                                      </p:cBhvr>
+                                    </p:animEffect>
+                                  </p:childTnLst>
+                                </p:cTn>
+                              </p:par>
+                            </p:childTnLst>
+                          </p:cTn>
+                        </p:par>
+                      </p:childTnLst>
+                    </p:cTn>
+                  </p:par>
+                </p:childTnLst>
+              </p:cTn>
+              <p:prevCondLst>
+                <p:cond evt="onPrev" delay="0">
+                  <p:tgtEl>
+                    <p:sldTgt/>
+                  </p:tgtEl>
+                </p:cond>
+              </p:prevCondLst>
+              <p:nextCondLst>
+                <p:cond evt="onNext" delay="0">
+                  <p:tgtEl>
+                    <p:sldTgt/>
+                  </p:tgtEl>
+                </p:cond>
+              </p:nextCondLst>
+            </p:seq>
+          </p:childTnLst>
+        </p:cTn>
+      </p:par>
+    </p:tnLst>
+  </p:timing>
 </p:sld>
 </file>
 
@@ -45039,6 +50002,209 @@
   <p:clrMapOvr>
     <a:masterClrMapping/>
   </p:clrMapOvr>
+  <mc:AlternateContent xmlns:mc="http://schemas.openxmlformats.org/markup-compatibility/2006">
+    <mc:Choice xmlns:p14="http://schemas.microsoft.com/office/powerpoint/2010/main" Requires="p14">
+      <p:transition spd="med" p14:dur="700">
+        <p:fade/>
+      </p:transition>
+    </mc:Choice>
+    <mc:Fallback>
+      <p:transition spd="med">
+        <p:fade/>
+      </p:transition>
+    </mc:Fallback>
+  </mc:AlternateContent>
+  <p:timing>
+    <p:tnLst>
+      <p:par>
+        <p:cTn id="1" dur="indefinite" restart="never" nodeType="tmRoot">
+          <p:childTnLst>
+            <p:seq concurrent="1" nextAc="seek">
+              <p:cTn id="2" dur="indefinite" nodeType="mainSeq">
+                <p:childTnLst>
+                  <p:par>
+                    <p:cTn id="3" fill="hold">
+                      <p:stCondLst>
+                        <p:cond delay="indefinite"/>
+                        <p:cond evt="onBegin" delay="0">
+                          <p:tn val="2"/>
+                        </p:cond>
+                      </p:stCondLst>
+                      <p:childTnLst>
+                        <p:par>
+                          <p:cTn id="4" fill="hold">
+                            <p:stCondLst>
+                              <p:cond delay="0"/>
+                            </p:stCondLst>
+                            <p:childTnLst>
+                              <p:par>
+                                <p:cTn id="5" presetID="10" presetClass="entr" presetSubtype="0" fill="hold" nodeType="afterEffect">
+                                  <p:stCondLst>
+                                    <p:cond delay="0"/>
+                                  </p:stCondLst>
+                                  <p:childTnLst>
+                                    <p:set>
+                                      <p:cBhvr>
+                                        <p:cTn id="6" dur="1" fill="hold">
+                                          <p:stCondLst>
+                                            <p:cond delay="0"/>
+                                          </p:stCondLst>
+                                        </p:cTn>
+                                        <p:tgtEl>
+                                          <p:spTgt spid="4"/>
+                                        </p:tgtEl>
+                                        <p:attrNameLst>
+                                          <p:attrName>style.visibility</p:attrName>
+                                        </p:attrNameLst>
+                                      </p:cBhvr>
+                                      <p:to>
+                                        <p:strVal val="visible"/>
+                                      </p:to>
+                                    </p:set>
+                                    <p:animEffect transition="in" filter="fade">
+                                      <p:cBhvr>
+                                        <p:cTn id="7" dur="500"/>
+                                        <p:tgtEl>
+                                          <p:spTgt spid="4"/>
+                                        </p:tgtEl>
+                                      </p:cBhvr>
+                                    </p:animEffect>
+                                  </p:childTnLst>
+                                </p:cTn>
+                              </p:par>
+                              <p:par>
+                                <p:cTn id="8" presetID="10" presetClass="entr" presetSubtype="0" fill="hold" nodeType="withEffect">
+                                  <p:stCondLst>
+                                    <p:cond delay="300"/>
+                                  </p:stCondLst>
+                                  <p:childTnLst>
+                                    <p:set>
+                                      <p:cBhvr>
+                                        <p:cTn id="9" dur="1" fill="hold">
+                                          <p:stCondLst>
+                                            <p:cond delay="0"/>
+                                          </p:stCondLst>
+                                        </p:cTn>
+                                        <p:tgtEl>
+                                          <p:spTgt spid="6"/>
+                                        </p:tgtEl>
+                                        <p:attrNameLst>
+                                          <p:attrName>style.visibility</p:attrName>
+                                        </p:attrNameLst>
+                                      </p:cBhvr>
+                                      <p:to>
+                                        <p:strVal val="visible"/>
+                                      </p:to>
+                                    </p:set>
+                                    <p:animEffect transition="in" filter="fade">
+                                      <p:cBhvr>
+                                        <p:cTn id="10" dur="500"/>
+                                        <p:tgtEl>
+                                          <p:spTgt spid="6"/>
+                                        </p:tgtEl>
+                                      </p:cBhvr>
+                                    </p:animEffect>
+                                  </p:childTnLst>
+                                </p:cTn>
+                              </p:par>
+                              <p:par>
+                                <p:cTn id="11" presetID="10" presetClass="entr" presetSubtype="0" fill="hold" nodeType="withEffect">
+                                  <p:stCondLst>
+                                    <p:cond delay="600"/>
+                                  </p:stCondLst>
+                                  <p:childTnLst>
+                                    <p:set>
+                                      <p:cBhvr>
+                                        <p:cTn id="12" dur="1" fill="hold">
+                                          <p:stCondLst>
+                                            <p:cond delay="0"/>
+                                          </p:stCondLst>
+                                        </p:cTn>
+                                        <p:tgtEl>
+                                          <p:spTgt spid="30"/>
+                                        </p:tgtEl>
+                                        <p:attrNameLst>
+                                          <p:attrName>style.visibility</p:attrName>
+                                        </p:attrNameLst>
+                                      </p:cBhvr>
+                                      <p:to>
+                                        <p:strVal val="visible"/>
+                                      </p:to>
+                                    </p:set>
+                                    <p:animEffect transition="in" filter="fade">
+                                      <p:cBhvr>
+                                        <p:cTn id="13" dur="500"/>
+                                        <p:tgtEl>
+                                          <p:spTgt spid="30"/>
+                                        </p:tgtEl>
+                                      </p:cBhvr>
+                                    </p:animEffect>
+                                  </p:childTnLst>
+                                </p:cTn>
+                              </p:par>
+                              <p:par>
+                                <p:cTn id="14" presetID="10" presetClass="entr" presetSubtype="0" fill="hold" nodeType="withEffect">
+                                  <p:stCondLst>
+                                    <p:cond delay="900"/>
+                                  </p:stCondLst>
+                                  <p:childTnLst>
+                                    <p:set>
+                                      <p:cBhvr>
+                                        <p:cTn id="15" dur="1" fill="hold">
+                                          <p:stCondLst>
+                                            <p:cond delay="0"/>
+                                          </p:stCondLst>
+                                        </p:cTn>
+                                        <p:tgtEl>
+                                          <p:spTgt spid="31"/>
+                                        </p:tgtEl>
+                                        <p:attrNameLst>
+                                          <p:attrName>style.visibility</p:attrName>
+                                        </p:attrNameLst>
+                                      </p:cBhvr>
+                                      <p:to>
+                                        <p:strVal val="visible"/>
+                                      </p:to>
+                                    </p:set>
+                                    <p:animEffect transition="in" filter="fade">
+                                      <p:cBhvr>
+                                        <p:cTn id="16" dur="500"/>
+                                        <p:tgtEl>
+                                          <p:spTgt spid="31"/>
+                                        </p:tgtEl>
+                                      </p:cBhvr>
+                                    </p:animEffect>
+                                  </p:childTnLst>
+                                </p:cTn>
+                              </p:par>
+                            </p:childTnLst>
+                          </p:cTn>
+                        </p:par>
+                      </p:childTnLst>
+                    </p:cTn>
+                  </p:par>
+                </p:childTnLst>
+              </p:cTn>
+              <p:prevCondLst>
+                <p:cond evt="onPrev" delay="0">
+                  <p:tgtEl>
+                    <p:sldTgt/>
+                  </p:tgtEl>
+                </p:cond>
+              </p:prevCondLst>
+              <p:nextCondLst>
+                <p:cond evt="onNext" delay="0">
+                  <p:tgtEl>
+                    <p:sldTgt/>
+                  </p:tgtEl>
+                </p:cond>
+              </p:nextCondLst>
+            </p:seq>
+          </p:childTnLst>
+        </p:cTn>
+      </p:par>
+    </p:tnLst>
+  </p:timing>
 </p:sld>
 </file>
 
